--- a/exports/pptx/lessons/senior-module-02-panchabhuta/day-06-modern.pptx
+++ b/exports/pptx/lessons/senior-module-02-panchabhuta/day-06-modern.pptx
@@ -15,9 +15,16 @@
     <p:sldId id="263" r:id="rId9"/>
     <p:sldId id="264" r:id="rId10"/>
     <p:sldId id="265" r:id="rId11"/>
+    <p:sldId id="266" r:id="rId12"/>
+    <p:sldId id="267" r:id="rId13"/>
+    <p:sldId id="268" r:id="rId14"/>
+    <p:sldId id="269" r:id="rId15"/>
+    <p:sldId id="270" r:id="rId16"/>
+    <p:sldId id="271" r:id="rId17"/>
+    <p:sldId id="272" r:id="rId18"/>
   </p:sldIdLst>
   <p:notesMasterIdLst>
-    <p:notesMasterId r:id="rId12"/>
+    <p:notesMasterId r:id="rId19"/>
   </p:notesMasterIdLst>
   <p:sldSz cx="9144000" cy="5143500"/>
   <p:notesSz cx="5143500" cy="9144000"/>
@@ -623,6 +630,622 @@
             <a:fld id="{F7021451-1387-4CA6-816F-3879F97B5CBC}" type="slidenum">
               <a:rPr lang="en-US"/>
               <a:t>10</a:t>
+            </a:fld>
+            <a:endParaRPr lang="en-US"/>
+          </a:p>
+        </p:txBody>
+      </p:sp>
+    </p:spTree>
+    <p:extLst>
+      <p:ext uri="{BB962C8B-B14F-4D97-AF65-F5344CB8AC3E}">
+        <p14:creationId xmlns:p14="http://schemas.microsoft.com/office/powerpoint/2010/main" val="1024086991"/>
+      </p:ext>
+    </p:extLst>
+  </p:cSld>
+  <p:clrMapOvr>
+    <a:masterClrMapping/>
+  </p:clrMapOvr>
+</p:notes>
+</file>
+
+<file path=ppt/notesSlides/notesSlide11.xml><?xml version="1.0" encoding="utf-8"?>
+<p:notes xmlns:a="http://schemas.openxmlformats.org/drawingml/2006/main" xmlns:r="http://schemas.openxmlformats.org/officeDocument/2006/relationships" xmlns:p="http://schemas.openxmlformats.org/presentationml/2006/main">
+  <p:cSld>
+    <p:spTree>
+      <p:nvGrpSpPr>
+        <p:cNvPr id="1" name=""/>
+        <p:cNvGrpSpPr/>
+        <p:nvPr/>
+      </p:nvGrpSpPr>
+      <p:grpSpPr>
+        <a:xfrm>
+          <a:off x="0" y="0"/>
+          <a:ext cx="0" cy="0"/>
+          <a:chOff x="0" y="0"/>
+          <a:chExt cx="0" cy="0"/>
+        </a:xfrm>
+      </p:grpSpPr>
+      <p:sp>
+        <p:nvSpPr>
+          <p:cNvPr id="2" name="Slide Image Placeholder 1"/>
+          <p:cNvSpPr>
+            <a:spLocks noGrp="1" noRot="1" noChangeAspect="1"/>
+          </p:cNvSpPr>
+          <p:nvPr>
+            <p:ph type="sldImg"/>
+          </p:nvPr>
+        </p:nvSpPr>
+        <p:spPr/>
+      </p:sp>
+      <p:sp>
+        <p:nvSpPr>
+          <p:cNvPr id="3" name="Notes Placeholder 2"/>
+          <p:cNvSpPr>
+            <a:spLocks noGrp="1"/>
+          </p:cNvSpPr>
+          <p:nvPr>
+            <p:ph type="body" idx="1"/>
+          </p:nvPr>
+        </p:nvSpPr>
+        <p:spPr/>
+        <p:txBody>
+          <a:bodyPr/>
+          <a:lstStyle/>
+          <a:p>
+            <a:r>
+              <a:rPr lang="en-US" dirty="0"/>
+              <a:t/>
+            </a:r>
+            <a:endParaRPr lang="en-US" dirty="0"/>
+          </a:p>
+        </p:txBody>
+      </p:sp>
+      <p:sp>
+        <p:nvSpPr>
+          <p:cNvPr id="4" name="Slide Number Placeholder 3"/>
+          <p:cNvSpPr>
+            <a:spLocks noGrp="1"/>
+          </p:cNvSpPr>
+          <p:nvPr>
+            <p:ph type="sldNum" sz="quarter" idx="10"/>
+          </p:nvPr>
+        </p:nvSpPr>
+        <p:spPr/>
+        <p:txBody>
+          <a:bodyPr/>
+          <a:lstStyle/>
+          <a:p>
+            <a:fld id="{F7021451-1387-4CA6-816F-3879F97B5CBC}" type="slidenum">
+              <a:rPr lang="en-US"/>
+              <a:t>11</a:t>
+            </a:fld>
+            <a:endParaRPr lang="en-US"/>
+          </a:p>
+        </p:txBody>
+      </p:sp>
+    </p:spTree>
+    <p:extLst>
+      <p:ext uri="{BB962C8B-B14F-4D97-AF65-F5344CB8AC3E}">
+        <p14:creationId xmlns:p14="http://schemas.microsoft.com/office/powerpoint/2010/main" val="1024086991"/>
+      </p:ext>
+    </p:extLst>
+  </p:cSld>
+  <p:clrMapOvr>
+    <a:masterClrMapping/>
+  </p:clrMapOvr>
+</p:notes>
+</file>
+
+<file path=ppt/notesSlides/notesSlide12.xml><?xml version="1.0" encoding="utf-8"?>
+<p:notes xmlns:a="http://schemas.openxmlformats.org/drawingml/2006/main" xmlns:r="http://schemas.openxmlformats.org/officeDocument/2006/relationships" xmlns:p="http://schemas.openxmlformats.org/presentationml/2006/main">
+  <p:cSld>
+    <p:spTree>
+      <p:nvGrpSpPr>
+        <p:cNvPr id="1" name=""/>
+        <p:cNvGrpSpPr/>
+        <p:nvPr/>
+      </p:nvGrpSpPr>
+      <p:grpSpPr>
+        <a:xfrm>
+          <a:off x="0" y="0"/>
+          <a:ext cx="0" cy="0"/>
+          <a:chOff x="0" y="0"/>
+          <a:chExt cx="0" cy="0"/>
+        </a:xfrm>
+      </p:grpSpPr>
+      <p:sp>
+        <p:nvSpPr>
+          <p:cNvPr id="2" name="Slide Image Placeholder 1"/>
+          <p:cNvSpPr>
+            <a:spLocks noGrp="1" noRot="1" noChangeAspect="1"/>
+          </p:cNvSpPr>
+          <p:nvPr>
+            <p:ph type="sldImg"/>
+          </p:nvPr>
+        </p:nvSpPr>
+        <p:spPr/>
+      </p:sp>
+      <p:sp>
+        <p:nvSpPr>
+          <p:cNvPr id="3" name="Notes Placeholder 2"/>
+          <p:cNvSpPr>
+            <a:spLocks noGrp="1"/>
+          </p:cNvSpPr>
+          <p:nvPr>
+            <p:ph type="body" idx="1"/>
+          </p:nvPr>
+        </p:nvSpPr>
+        <p:spPr/>
+        <p:txBody>
+          <a:bodyPr/>
+          <a:lstStyle/>
+          <a:p>
+            <a:r>
+              <a:rPr lang="en-US" dirty="0"/>
+              <a:t/>
+            </a:r>
+            <a:endParaRPr lang="en-US" dirty="0"/>
+          </a:p>
+        </p:txBody>
+      </p:sp>
+      <p:sp>
+        <p:nvSpPr>
+          <p:cNvPr id="4" name="Slide Number Placeholder 3"/>
+          <p:cNvSpPr>
+            <a:spLocks noGrp="1"/>
+          </p:cNvSpPr>
+          <p:nvPr>
+            <p:ph type="sldNum" sz="quarter" idx="10"/>
+          </p:nvPr>
+        </p:nvSpPr>
+        <p:spPr/>
+        <p:txBody>
+          <a:bodyPr/>
+          <a:lstStyle/>
+          <a:p>
+            <a:fld id="{F7021451-1387-4CA6-816F-3879F97B5CBC}" type="slidenum">
+              <a:rPr lang="en-US"/>
+              <a:t>12</a:t>
+            </a:fld>
+            <a:endParaRPr lang="en-US"/>
+          </a:p>
+        </p:txBody>
+      </p:sp>
+    </p:spTree>
+    <p:extLst>
+      <p:ext uri="{BB962C8B-B14F-4D97-AF65-F5344CB8AC3E}">
+        <p14:creationId xmlns:p14="http://schemas.microsoft.com/office/powerpoint/2010/main" val="1024086991"/>
+      </p:ext>
+    </p:extLst>
+  </p:cSld>
+  <p:clrMapOvr>
+    <a:masterClrMapping/>
+  </p:clrMapOvr>
+</p:notes>
+</file>
+
+<file path=ppt/notesSlides/notesSlide13.xml><?xml version="1.0" encoding="utf-8"?>
+<p:notes xmlns:a="http://schemas.openxmlformats.org/drawingml/2006/main" xmlns:r="http://schemas.openxmlformats.org/officeDocument/2006/relationships" xmlns:p="http://schemas.openxmlformats.org/presentationml/2006/main">
+  <p:cSld>
+    <p:spTree>
+      <p:nvGrpSpPr>
+        <p:cNvPr id="1" name=""/>
+        <p:cNvGrpSpPr/>
+        <p:nvPr/>
+      </p:nvGrpSpPr>
+      <p:grpSpPr>
+        <a:xfrm>
+          <a:off x="0" y="0"/>
+          <a:ext cx="0" cy="0"/>
+          <a:chOff x="0" y="0"/>
+          <a:chExt cx="0" cy="0"/>
+        </a:xfrm>
+      </p:grpSpPr>
+      <p:sp>
+        <p:nvSpPr>
+          <p:cNvPr id="2" name="Slide Image Placeholder 1"/>
+          <p:cNvSpPr>
+            <a:spLocks noGrp="1" noRot="1" noChangeAspect="1"/>
+          </p:cNvSpPr>
+          <p:nvPr>
+            <p:ph type="sldImg"/>
+          </p:nvPr>
+        </p:nvSpPr>
+        <p:spPr/>
+      </p:sp>
+      <p:sp>
+        <p:nvSpPr>
+          <p:cNvPr id="3" name="Notes Placeholder 2"/>
+          <p:cNvSpPr>
+            <a:spLocks noGrp="1"/>
+          </p:cNvSpPr>
+          <p:nvPr>
+            <p:ph type="body" idx="1"/>
+          </p:nvPr>
+        </p:nvSpPr>
+        <p:spPr/>
+        <p:txBody>
+          <a:bodyPr/>
+          <a:lstStyle/>
+          <a:p>
+            <a:r>
+              <a:rPr lang="en-US" dirty="0"/>
+              <a:t/>
+            </a:r>
+            <a:endParaRPr lang="en-US" dirty="0"/>
+          </a:p>
+        </p:txBody>
+      </p:sp>
+      <p:sp>
+        <p:nvSpPr>
+          <p:cNvPr id="4" name="Slide Number Placeholder 3"/>
+          <p:cNvSpPr>
+            <a:spLocks noGrp="1"/>
+          </p:cNvSpPr>
+          <p:nvPr>
+            <p:ph type="sldNum" sz="quarter" idx="10"/>
+          </p:nvPr>
+        </p:nvSpPr>
+        <p:spPr/>
+        <p:txBody>
+          <a:bodyPr/>
+          <a:lstStyle/>
+          <a:p>
+            <a:fld id="{F7021451-1387-4CA6-816F-3879F97B5CBC}" type="slidenum">
+              <a:rPr lang="en-US"/>
+              <a:t>13</a:t>
+            </a:fld>
+            <a:endParaRPr lang="en-US"/>
+          </a:p>
+        </p:txBody>
+      </p:sp>
+    </p:spTree>
+    <p:extLst>
+      <p:ext uri="{BB962C8B-B14F-4D97-AF65-F5344CB8AC3E}">
+        <p14:creationId xmlns:p14="http://schemas.microsoft.com/office/powerpoint/2010/main" val="1024086991"/>
+      </p:ext>
+    </p:extLst>
+  </p:cSld>
+  <p:clrMapOvr>
+    <a:masterClrMapping/>
+  </p:clrMapOvr>
+</p:notes>
+</file>
+
+<file path=ppt/notesSlides/notesSlide14.xml><?xml version="1.0" encoding="utf-8"?>
+<p:notes xmlns:a="http://schemas.openxmlformats.org/drawingml/2006/main" xmlns:r="http://schemas.openxmlformats.org/officeDocument/2006/relationships" xmlns:p="http://schemas.openxmlformats.org/presentationml/2006/main">
+  <p:cSld>
+    <p:spTree>
+      <p:nvGrpSpPr>
+        <p:cNvPr id="1" name=""/>
+        <p:cNvGrpSpPr/>
+        <p:nvPr/>
+      </p:nvGrpSpPr>
+      <p:grpSpPr>
+        <a:xfrm>
+          <a:off x="0" y="0"/>
+          <a:ext cx="0" cy="0"/>
+          <a:chOff x="0" y="0"/>
+          <a:chExt cx="0" cy="0"/>
+        </a:xfrm>
+      </p:grpSpPr>
+      <p:sp>
+        <p:nvSpPr>
+          <p:cNvPr id="2" name="Slide Image Placeholder 1"/>
+          <p:cNvSpPr>
+            <a:spLocks noGrp="1" noRot="1" noChangeAspect="1"/>
+          </p:cNvSpPr>
+          <p:nvPr>
+            <p:ph type="sldImg"/>
+          </p:nvPr>
+        </p:nvSpPr>
+        <p:spPr/>
+      </p:sp>
+      <p:sp>
+        <p:nvSpPr>
+          <p:cNvPr id="3" name="Notes Placeholder 2"/>
+          <p:cNvSpPr>
+            <a:spLocks noGrp="1"/>
+          </p:cNvSpPr>
+          <p:nvPr>
+            <p:ph type="body" idx="1"/>
+          </p:nvPr>
+        </p:nvSpPr>
+        <p:spPr/>
+        <p:txBody>
+          <a:bodyPr/>
+          <a:lstStyle/>
+          <a:p>
+            <a:r>
+              <a:rPr lang="en-US" dirty="0"/>
+              <a:t/>
+            </a:r>
+            <a:endParaRPr lang="en-US" dirty="0"/>
+          </a:p>
+        </p:txBody>
+      </p:sp>
+      <p:sp>
+        <p:nvSpPr>
+          <p:cNvPr id="4" name="Slide Number Placeholder 3"/>
+          <p:cNvSpPr>
+            <a:spLocks noGrp="1"/>
+          </p:cNvSpPr>
+          <p:nvPr>
+            <p:ph type="sldNum" sz="quarter" idx="10"/>
+          </p:nvPr>
+        </p:nvSpPr>
+        <p:spPr/>
+        <p:txBody>
+          <a:bodyPr/>
+          <a:lstStyle/>
+          <a:p>
+            <a:fld id="{F7021451-1387-4CA6-816F-3879F97B5CBC}" type="slidenum">
+              <a:rPr lang="en-US"/>
+              <a:t>14</a:t>
+            </a:fld>
+            <a:endParaRPr lang="en-US"/>
+          </a:p>
+        </p:txBody>
+      </p:sp>
+    </p:spTree>
+    <p:extLst>
+      <p:ext uri="{BB962C8B-B14F-4D97-AF65-F5344CB8AC3E}">
+        <p14:creationId xmlns:p14="http://schemas.microsoft.com/office/powerpoint/2010/main" val="1024086991"/>
+      </p:ext>
+    </p:extLst>
+  </p:cSld>
+  <p:clrMapOvr>
+    <a:masterClrMapping/>
+  </p:clrMapOvr>
+</p:notes>
+</file>
+
+<file path=ppt/notesSlides/notesSlide15.xml><?xml version="1.0" encoding="utf-8"?>
+<p:notes xmlns:a="http://schemas.openxmlformats.org/drawingml/2006/main" xmlns:r="http://schemas.openxmlformats.org/officeDocument/2006/relationships" xmlns:p="http://schemas.openxmlformats.org/presentationml/2006/main">
+  <p:cSld>
+    <p:spTree>
+      <p:nvGrpSpPr>
+        <p:cNvPr id="1" name=""/>
+        <p:cNvGrpSpPr/>
+        <p:nvPr/>
+      </p:nvGrpSpPr>
+      <p:grpSpPr>
+        <a:xfrm>
+          <a:off x="0" y="0"/>
+          <a:ext cx="0" cy="0"/>
+          <a:chOff x="0" y="0"/>
+          <a:chExt cx="0" cy="0"/>
+        </a:xfrm>
+      </p:grpSpPr>
+      <p:sp>
+        <p:nvSpPr>
+          <p:cNvPr id="2" name="Slide Image Placeholder 1"/>
+          <p:cNvSpPr>
+            <a:spLocks noGrp="1" noRot="1" noChangeAspect="1"/>
+          </p:cNvSpPr>
+          <p:nvPr>
+            <p:ph type="sldImg"/>
+          </p:nvPr>
+        </p:nvSpPr>
+        <p:spPr/>
+      </p:sp>
+      <p:sp>
+        <p:nvSpPr>
+          <p:cNvPr id="3" name="Notes Placeholder 2"/>
+          <p:cNvSpPr>
+            <a:spLocks noGrp="1"/>
+          </p:cNvSpPr>
+          <p:nvPr>
+            <p:ph type="body" idx="1"/>
+          </p:nvPr>
+        </p:nvSpPr>
+        <p:spPr/>
+        <p:txBody>
+          <a:bodyPr/>
+          <a:lstStyle/>
+          <a:p>
+            <a:r>
+              <a:rPr lang="en-US" dirty="0"/>
+              <a:t/>
+            </a:r>
+            <a:endParaRPr lang="en-US" dirty="0"/>
+          </a:p>
+        </p:txBody>
+      </p:sp>
+      <p:sp>
+        <p:nvSpPr>
+          <p:cNvPr id="4" name="Slide Number Placeholder 3"/>
+          <p:cNvSpPr>
+            <a:spLocks noGrp="1"/>
+          </p:cNvSpPr>
+          <p:nvPr>
+            <p:ph type="sldNum" sz="quarter" idx="10"/>
+          </p:nvPr>
+        </p:nvSpPr>
+        <p:spPr/>
+        <p:txBody>
+          <a:bodyPr/>
+          <a:lstStyle/>
+          <a:p>
+            <a:fld id="{F7021451-1387-4CA6-816F-3879F97B5CBC}" type="slidenum">
+              <a:rPr lang="en-US"/>
+              <a:t>15</a:t>
+            </a:fld>
+            <a:endParaRPr lang="en-US"/>
+          </a:p>
+        </p:txBody>
+      </p:sp>
+    </p:spTree>
+    <p:extLst>
+      <p:ext uri="{BB962C8B-B14F-4D97-AF65-F5344CB8AC3E}">
+        <p14:creationId xmlns:p14="http://schemas.microsoft.com/office/powerpoint/2010/main" val="1024086991"/>
+      </p:ext>
+    </p:extLst>
+  </p:cSld>
+  <p:clrMapOvr>
+    <a:masterClrMapping/>
+  </p:clrMapOvr>
+</p:notes>
+</file>
+
+<file path=ppt/notesSlides/notesSlide16.xml><?xml version="1.0" encoding="utf-8"?>
+<p:notes xmlns:a="http://schemas.openxmlformats.org/drawingml/2006/main" xmlns:r="http://schemas.openxmlformats.org/officeDocument/2006/relationships" xmlns:p="http://schemas.openxmlformats.org/presentationml/2006/main">
+  <p:cSld>
+    <p:spTree>
+      <p:nvGrpSpPr>
+        <p:cNvPr id="1" name=""/>
+        <p:cNvGrpSpPr/>
+        <p:nvPr/>
+      </p:nvGrpSpPr>
+      <p:grpSpPr>
+        <a:xfrm>
+          <a:off x="0" y="0"/>
+          <a:ext cx="0" cy="0"/>
+          <a:chOff x="0" y="0"/>
+          <a:chExt cx="0" cy="0"/>
+        </a:xfrm>
+      </p:grpSpPr>
+      <p:sp>
+        <p:nvSpPr>
+          <p:cNvPr id="2" name="Slide Image Placeholder 1"/>
+          <p:cNvSpPr>
+            <a:spLocks noGrp="1" noRot="1" noChangeAspect="1"/>
+          </p:cNvSpPr>
+          <p:nvPr>
+            <p:ph type="sldImg"/>
+          </p:nvPr>
+        </p:nvSpPr>
+        <p:spPr/>
+      </p:sp>
+      <p:sp>
+        <p:nvSpPr>
+          <p:cNvPr id="3" name="Notes Placeholder 2"/>
+          <p:cNvSpPr>
+            <a:spLocks noGrp="1"/>
+          </p:cNvSpPr>
+          <p:nvPr>
+            <p:ph type="body" idx="1"/>
+          </p:nvPr>
+        </p:nvSpPr>
+        <p:spPr/>
+        <p:txBody>
+          <a:bodyPr/>
+          <a:lstStyle/>
+          <a:p>
+            <a:r>
+              <a:rPr lang="en-US" dirty="0"/>
+              <a:t/>
+            </a:r>
+            <a:endParaRPr lang="en-US" dirty="0"/>
+          </a:p>
+        </p:txBody>
+      </p:sp>
+      <p:sp>
+        <p:nvSpPr>
+          <p:cNvPr id="4" name="Slide Number Placeholder 3"/>
+          <p:cNvSpPr>
+            <a:spLocks noGrp="1"/>
+          </p:cNvSpPr>
+          <p:nvPr>
+            <p:ph type="sldNum" sz="quarter" idx="10"/>
+          </p:nvPr>
+        </p:nvSpPr>
+        <p:spPr/>
+        <p:txBody>
+          <a:bodyPr/>
+          <a:lstStyle/>
+          <a:p>
+            <a:fld id="{F7021451-1387-4CA6-816F-3879F97B5CBC}" type="slidenum">
+              <a:rPr lang="en-US"/>
+              <a:t>16</a:t>
+            </a:fld>
+            <a:endParaRPr lang="en-US"/>
+          </a:p>
+        </p:txBody>
+      </p:sp>
+    </p:spTree>
+    <p:extLst>
+      <p:ext uri="{BB962C8B-B14F-4D97-AF65-F5344CB8AC3E}">
+        <p14:creationId xmlns:p14="http://schemas.microsoft.com/office/powerpoint/2010/main" val="1024086991"/>
+      </p:ext>
+    </p:extLst>
+  </p:cSld>
+  <p:clrMapOvr>
+    <a:masterClrMapping/>
+  </p:clrMapOvr>
+</p:notes>
+</file>
+
+<file path=ppt/notesSlides/notesSlide17.xml><?xml version="1.0" encoding="utf-8"?>
+<p:notes xmlns:a="http://schemas.openxmlformats.org/drawingml/2006/main" xmlns:r="http://schemas.openxmlformats.org/officeDocument/2006/relationships" xmlns:p="http://schemas.openxmlformats.org/presentationml/2006/main">
+  <p:cSld>
+    <p:spTree>
+      <p:nvGrpSpPr>
+        <p:cNvPr id="1" name=""/>
+        <p:cNvGrpSpPr/>
+        <p:nvPr/>
+      </p:nvGrpSpPr>
+      <p:grpSpPr>
+        <a:xfrm>
+          <a:off x="0" y="0"/>
+          <a:ext cx="0" cy="0"/>
+          <a:chOff x="0" y="0"/>
+          <a:chExt cx="0" cy="0"/>
+        </a:xfrm>
+      </p:grpSpPr>
+      <p:sp>
+        <p:nvSpPr>
+          <p:cNvPr id="2" name="Slide Image Placeholder 1"/>
+          <p:cNvSpPr>
+            <a:spLocks noGrp="1" noRot="1" noChangeAspect="1"/>
+          </p:cNvSpPr>
+          <p:nvPr>
+            <p:ph type="sldImg"/>
+          </p:nvPr>
+        </p:nvSpPr>
+        <p:spPr/>
+      </p:sp>
+      <p:sp>
+        <p:nvSpPr>
+          <p:cNvPr id="3" name="Notes Placeholder 2"/>
+          <p:cNvSpPr>
+            <a:spLocks noGrp="1"/>
+          </p:cNvSpPr>
+          <p:nvPr>
+            <p:ph type="body" idx="1"/>
+          </p:nvPr>
+        </p:nvSpPr>
+        <p:spPr/>
+        <p:txBody>
+          <a:bodyPr/>
+          <a:lstStyle/>
+          <a:p>
+            <a:r>
+              <a:rPr lang="en-US" dirty="0"/>
+              <a:t/>
+            </a:r>
+            <a:endParaRPr lang="en-US" dirty="0"/>
+          </a:p>
+        </p:txBody>
+      </p:sp>
+      <p:sp>
+        <p:nvSpPr>
+          <p:cNvPr id="4" name="Slide Number Placeholder 3"/>
+          <p:cNvSpPr>
+            <a:spLocks noGrp="1"/>
+          </p:cNvSpPr>
+          <p:nvPr>
+            <p:ph type="sldNum" sz="quarter" idx="10"/>
+          </p:nvPr>
+        </p:nvSpPr>
+        <p:spPr/>
+        <p:txBody>
+          <a:bodyPr/>
+          <a:lstStyle/>
+          <a:p>
+            <a:fld id="{F7021451-1387-4CA6-816F-3879F97B5CBC}" type="slidenum">
+              <a:rPr lang="en-US"/>
+              <a:t>17</a:t>
             </a:fld>
             <a:endParaRPr lang="en-US"/>
           </a:p>
@@ -1876,194 +2499,6 @@
         </p:nvSpPr>
         <p:spPr>
           <a:xfrm>
-            <a:off x="406301" y="1223963"/>
-            <a:ext cx="8498026" cy="274290"/>
-          </a:xfrm>
-          <a:prstGeom prst="rect">
-            <a:avLst/>
-          </a:prstGeom>
-          <a:noFill/>
-          <a:ln/>
-        </p:spPr>
-        <p:txBody>
-          <a:bodyPr wrap="square" lIns="0" tIns="0" rIns="0" bIns="0" rtlCol="0" anchor="t"/>
-          <a:lstStyle/>
-          <a:p>
-            <a:pPr algn="l" indent="0" marL="0">
-              <a:lnSpc>
-                <a:spcPts val="2160"/>
-              </a:lnSpc>
-              <a:spcBef>
-                <a:spcPts val="600"/>
-              </a:spcBef>
-              <a:spcAft>
-                <a:spcPts val="800"/>
-              </a:spcAft>
-              <a:buNone/>
-            </a:pPr>
-            <a:r>
-              <a:rPr lang="en-US" sz="1800" b="1" dirty="0">
-                <a:solidFill>
-                  <a:srgbClr val="997929"/>
-                </a:solidFill>
-                <a:latin typeface="Times New Roman" pitchFamily="34" charset="0"/>
-                <a:ea typeface="Times New Roman" pitchFamily="34" charset="-122"/>
-                <a:cs typeface="Times New Roman" pitchFamily="34" charset="-120"/>
-              </a:rPr>
-              <a:t>Learning objective</a:t>
-            </a:r>
-            <a:endParaRPr lang="en-US" sz="1800" dirty="0"/>
-          </a:p>
-        </p:txBody>
-      </p:sp>
-      <p:sp>
-        <p:nvSpPr>
-          <p:cNvPr id="6" name="Text 4"/>
-          <p:cNvSpPr/>
-          <p:nvPr/>
-        </p:nvSpPr>
-        <p:spPr>
-          <a:xfrm>
-            <a:off x="406301" y="1637854"/>
-            <a:ext cx="8498026" cy="426541"/>
-          </a:xfrm>
-          <a:prstGeom prst="rect">
-            <a:avLst/>
-          </a:prstGeom>
-          <a:noFill/>
-          <a:ln/>
-        </p:spPr>
-        <p:txBody>
-          <a:bodyPr wrap="square" lIns="0" tIns="0" rIns="0" bIns="0" rtlCol="0" anchor="t"/>
-          <a:lstStyle/>
-          <a:p>
-            <a:pPr algn="l" indent="0" marL="0">
-              <a:lnSpc>
-                <a:spcPts val="1680"/>
-              </a:lnSpc>
-              <a:spcBef>
-                <a:spcPts val="300"/>
-              </a:spcBef>
-              <a:spcAft>
-                <a:spcPts val="300"/>
-              </a:spcAft>
-              <a:buNone/>
-            </a:pPr>
-            <a:r>
-              <a:rPr lang="en-US" sz="1200" dirty="0">
-                <a:solidFill>
-                  <a:srgbClr val="1A1A1A"/>
-                </a:solidFill>
-                <a:latin typeface="Georgia" pitchFamily="34" charset="0"/>
-                <a:ea typeface="Georgia" pitchFamily="34" charset="-122"/>
-                <a:cs typeface="Georgia" pitchFamily="34" charset="-120"/>
-              </a:rPr>
-              <a:t>Students identify three things modern science </a:t>
-            </a:r>
-            <a:pPr algn="l" indent="0" marL="0">
-              <a:lnSpc>
-                <a:spcPts val="1680"/>
-              </a:lnSpc>
-              <a:spcBef>
-                <a:spcPts val="300"/>
-              </a:spcBef>
-              <a:spcAft>
-                <a:spcPts val="300"/>
-              </a:spcAft>
-              <a:buNone/>
-            </a:pPr>
-            <a:r>
-              <a:rPr lang="en-US" sz="1200" i="1" dirty="0">
-                <a:solidFill>
-                  <a:srgbClr val="1A1A1A"/>
-                </a:solidFill>
-                <a:latin typeface="Georgia" pitchFamily="34" charset="0"/>
-                <a:ea typeface="Georgia" pitchFamily="34" charset="-122"/>
-                <a:cs typeface="Georgia" pitchFamily="34" charset="-120"/>
-              </a:rPr>
-              <a:t>adds</a:t>
-            </a:r>
-            <a:pPr algn="l" indent="0" marL="0">
-              <a:lnSpc>
-                <a:spcPts val="1680"/>
-              </a:lnSpc>
-              <a:spcBef>
-                <a:spcPts val="300"/>
-              </a:spcBef>
-              <a:spcAft>
-                <a:spcPts val="300"/>
-              </a:spcAft>
-              <a:buNone/>
-            </a:pPr>
-            <a:r>
-              <a:rPr lang="en-US" sz="1200" dirty="0">
-                <a:solidFill>
-                  <a:srgbClr val="1A1A1A"/>
-                </a:solidFill>
-                <a:latin typeface="Georgia" pitchFamily="34" charset="0"/>
-                <a:ea typeface="Georgia" pitchFamily="34" charset="-122"/>
-                <a:cs typeface="Georgia" pitchFamily="34" charset="-120"/>
-              </a:rPr>
-              <a:t> to the picture that Sāṅkhya does not have, and three things Sāṅkhya </a:t>
-            </a:r>
-            <a:pPr algn="l" indent="0" marL="0">
-              <a:lnSpc>
-                <a:spcPts val="1680"/>
-              </a:lnSpc>
-              <a:spcBef>
-                <a:spcPts val="300"/>
-              </a:spcBef>
-              <a:spcAft>
-                <a:spcPts val="300"/>
-              </a:spcAft>
-              <a:buNone/>
-            </a:pPr>
-            <a:r>
-              <a:rPr lang="en-US" sz="1200" i="1" dirty="0">
-                <a:solidFill>
-                  <a:srgbClr val="1A1A1A"/>
-                </a:solidFill>
-                <a:latin typeface="Georgia" pitchFamily="34" charset="0"/>
-                <a:ea typeface="Georgia" pitchFamily="34" charset="-122"/>
-                <a:cs typeface="Georgia" pitchFamily="34" charset="-120"/>
-              </a:rPr>
-              <a:t>includes</a:t>
-            </a:r>
-            <a:pPr algn="l" indent="0" marL="0">
-              <a:lnSpc>
-                <a:spcPts val="1680"/>
-              </a:lnSpc>
-              <a:spcBef>
-                <a:spcPts val="300"/>
-              </a:spcBef>
-              <a:spcAft>
-                <a:spcPts val="300"/>
-              </a:spcAft>
-              <a:buNone/>
-            </a:pPr>
-            <a:r>
-              <a:rPr lang="en-US" sz="1200" dirty="0">
-                <a:solidFill>
-                  <a:srgbClr val="1A1A1A"/>
-                </a:solidFill>
-                <a:latin typeface="Georgia" pitchFamily="34" charset="0"/>
-                <a:ea typeface="Georgia" pitchFamily="34" charset="-122"/>
-                <a:cs typeface="Georgia" pitchFamily="34" charset="-120"/>
-              </a:rPr>
-              <a:t> that modern science explicitly excludes.</a:t>
-            </a:r>
-            <a:endParaRPr lang="en-US" sz="1200" dirty="0"/>
-          </a:p>
-        </p:txBody>
-      </p:sp>
-      <p:sp>
-        <p:nvSpPr>
-          <p:cNvPr id="7" name="Text 5"/>
-          <p:cNvSpPr/>
-          <p:nvPr/>
-        </p:nvSpPr>
-        <p:spPr>
-          <a:xfrm>
             <a:off x="406301" y="4434929"/>
             <a:ext cx="8498026" cy="213271"/>
           </a:xfrm>
@@ -2208,7 +2643,7 @@
                 <a:ea typeface="Times New Roman" pitchFamily="34" charset="-122"/>
                 <a:cs typeface="Times New Roman" pitchFamily="34" charset="-120"/>
               </a:rPr>
-              <a:t>Citation(s) used</a:t>
+              <a:t>Core (25 min) (cont.)</a:t>
             </a:r>
             <a:endParaRPr lang="en-US" sz="1800" dirty="0"/>
           </a:p>
@@ -2222,8 +2657,8 @@
         </p:nvSpPr>
         <p:spPr>
           <a:xfrm>
-            <a:off x="406301" y="870942"/>
-            <a:ext cx="8498026" cy="213271"/>
+            <a:off x="634901" y="883593"/>
+            <a:ext cx="8102798" cy="281880"/>
           </a:xfrm>
           <a:prstGeom prst="rect">
             <a:avLst/>
@@ -2235,13 +2670,31 @@
           <a:bodyPr wrap="square" lIns="0" tIns="0" rIns="0" bIns="0" rtlCol="0" anchor="t"/>
           <a:lstStyle/>
           <a:p>
-            <a:pPr algn="l" indent="0" marL="0">
-              <a:lnSpc>
-                <a:spcPts val="1680"/>
-              </a:lnSpc>
-              <a:spcBef>
-                <a:spcPts val="300"/>
-              </a:spcBef>
+            <a:pPr algn="l" marL="342900" indent="-342900">
+              <a:lnSpc>
+                <a:spcPts val="1620"/>
+              </a:lnSpc>
+              <a:spcAft>
+                <a:spcPts val="300"/>
+              </a:spcAft>
+              <a:buSzPct val="100000"/>
+              <a:buChar char="•"/>
+            </a:pPr>
+            <a:r>
+              <a:rPr lang="en-US" sz="1200" b="1" dirty="0">
+                <a:solidFill>
+                  <a:srgbClr val="1A1A1A"/>
+                </a:solidFill>
+                <a:latin typeface="Georgia" pitchFamily="34" charset="0"/>
+                <a:ea typeface="Georgia" pitchFamily="34" charset="-122"/>
+                <a:cs typeface="Georgia" pitchFamily="34" charset="-120"/>
+              </a:rPr>
+              <a:t>The honest framing:</a:t>
+            </a:r>
+            <a:pPr algn="l" indent="0" marL="0">
+              <a:lnSpc>
+                <a:spcPts val="1620"/>
+              </a:lnSpc>
               <a:spcAft>
                 <a:spcPts val="300"/>
               </a:spcAft>
@@ -2256,7 +2709,47 @@
                 <a:ea typeface="Georgia" pitchFamily="34" charset="-122"/>
                 <a:cs typeface="Georgia" pitchFamily="34" charset="-120"/>
               </a:rPr>
-              <a:t>– NCERT Class 11 Chemistry, Chapter 1.</a:t>
+              <a:t> these are different KINDS of inquiry, not different </a:t>
+            </a:r>
+            <a:pPr algn="l" indent="0" marL="0">
+              <a:lnSpc>
+                <a:spcPts val="1620"/>
+              </a:lnSpc>
+              <a:spcAft>
+                <a:spcPts val="300"/>
+              </a:spcAft>
+              <a:buNone/>
+            </a:pPr>
+            <a:r>
+              <a:rPr lang="en-US" sz="1200" i="1" dirty="0">
+                <a:solidFill>
+                  <a:srgbClr val="1A1A1A"/>
+                </a:solidFill>
+                <a:latin typeface="Georgia" pitchFamily="34" charset="0"/>
+                <a:ea typeface="Georgia" pitchFamily="34" charset="-122"/>
+                <a:cs typeface="Georgia" pitchFamily="34" charset="-120"/>
+              </a:rPr>
+              <a:t>qualities</a:t>
+            </a:r>
+            <a:pPr algn="l" indent="0" marL="0">
+              <a:lnSpc>
+                <a:spcPts val="1620"/>
+              </a:lnSpc>
+              <a:spcAft>
+                <a:spcPts val="300"/>
+              </a:spcAft>
+              <a:buNone/>
+            </a:pPr>
+            <a:r>
+              <a:rPr lang="en-US" sz="1200" dirty="0">
+                <a:solidFill>
+                  <a:srgbClr val="1A1A1A"/>
+                </a:solidFill>
+                <a:latin typeface="Georgia" pitchFamily="34" charset="0"/>
+                <a:ea typeface="Georgia" pitchFamily="34" charset="-122"/>
+                <a:cs typeface="Georgia" pitchFamily="34" charset="-120"/>
+              </a:rPr>
+              <a:t> of inquiry.</a:t>
             </a:r>
             <a:endParaRPr lang="en-US" sz="1200" dirty="0"/>
           </a:p>
@@ -2270,8 +2763,8 @@
         </p:nvSpPr>
         <p:spPr>
           <a:xfrm>
-            <a:off x="634901" y="1173063"/>
-            <a:ext cx="8102798" cy="281880"/>
+            <a:off x="406301" y="1254323"/>
+            <a:ext cx="8498026" cy="213271"/>
           </a:xfrm>
           <a:prstGeom prst="rect">
             <a:avLst/>
@@ -2283,6 +2776,212 @@
           <a:bodyPr wrap="square" lIns="0" tIns="0" rIns="0" bIns="0" rtlCol="0" anchor="t"/>
           <a:lstStyle/>
           <a:p>
+            <a:pPr algn="l" indent="0" marL="0">
+              <a:lnSpc>
+                <a:spcPts val="1680"/>
+              </a:lnSpc>
+              <a:spcBef>
+                <a:spcPts val="300"/>
+              </a:spcBef>
+              <a:spcAft>
+                <a:spcPts val="300"/>
+              </a:spcAft>
+              <a:buNone/>
+            </a:pPr>
+            <a:r>
+              <a:rPr lang="en-US" sz="1200" i="1" dirty="0">
+                <a:solidFill>
+                  <a:srgbClr val="1A1A1A"/>
+                </a:solidFill>
+                <a:latin typeface="Georgia" pitchFamily="34" charset="0"/>
+                <a:ea typeface="Georgia" pitchFamily="34" charset="-122"/>
+                <a:cs typeface="Georgia" pitchFamily="34" charset="-120"/>
+              </a:rPr>
+              <a:t>Each row: Inquiry · Modern science · Sāṅkhya.</a:t>
+            </a:r>
+            <a:endParaRPr lang="en-US" sz="1200" dirty="0"/>
+          </a:p>
+        </p:txBody>
+      </p:sp>
+      <p:sp>
+        <p:nvSpPr>
+          <p:cNvPr id="6" name="Text 4"/>
+          <p:cNvSpPr/>
+          <p:nvPr/>
+        </p:nvSpPr>
+        <p:spPr>
+          <a:xfrm>
+            <a:off x="406301" y="4434929"/>
+            <a:ext cx="8498026" cy="213271"/>
+          </a:xfrm>
+          <a:prstGeom prst="rect">
+            <a:avLst/>
+          </a:prstGeom>
+          <a:noFill/>
+          <a:ln/>
+        </p:spPr>
+        <p:txBody>
+          <a:bodyPr wrap="square" lIns="0" tIns="0" rIns="0" bIns="0" rtlCol="0" anchor="t"/>
+          <a:lstStyle/>
+          <a:p>
+            <a:pPr algn="l" indent="0" marL="0">
+              <a:lnSpc>
+                <a:spcPts val="1680"/>
+              </a:lnSpc>
+              <a:spcBef>
+                <a:spcPts val="300"/>
+              </a:spcBef>
+              <a:spcAft>
+                <a:spcPts val="300"/>
+              </a:spcAft>
+              <a:buNone/>
+            </a:pPr>
+            <a:r>
+              <a:rPr lang="en-US" sz="1200" dirty="0">
+                <a:solidFill>
+                  <a:srgbClr val="1A1A1A"/>
+                </a:solidFill>
+                <a:latin typeface="Georgia" pitchFamily="34" charset="0"/>
+                <a:ea typeface="Georgia" pitchFamily="34" charset="-122"/>
+                <a:cs typeface="Georgia" pitchFamily="34" charset="-120"/>
+              </a:rPr>
+              <a:t>Senior ·  · IKS Curriculum</a:t>
+            </a:r>
+            <a:endParaRPr lang="en-US" sz="1200" dirty="0"/>
+          </a:p>
+        </p:txBody>
+      </p:sp>
+    </p:spTree>
+  </p:cSld>
+  <p:clrMapOvr>
+    <a:masterClrMapping/>
+  </p:clrMapOvr>
+</p:sld>
+</file>
+
+<file path=ppt/slides/slide11.xml><?xml version="1.0" encoding="utf-8"?>
+<p:sld xmlns:a="http://schemas.openxmlformats.org/drawingml/2006/main" xmlns:r="http://schemas.openxmlformats.org/officeDocument/2006/relationships" xmlns:p="http://schemas.openxmlformats.org/presentationml/2006/main">
+  <p:cSld name="Slide 11">
+    <p:bg>
+      <p:bgPr>
+        <a:solidFill>
+          <a:srgbClr val="FAF7F2"/>
+        </a:solidFill>
+      </p:bgPr>
+    </p:bg>
+    <p:spTree>
+      <p:nvGrpSpPr>
+        <p:cNvPr id="1" name=""/>
+        <p:cNvGrpSpPr/>
+        <p:nvPr/>
+      </p:nvGrpSpPr>
+      <p:grpSpPr>
+        <a:xfrm>
+          <a:off x="0" y="0"/>
+          <a:ext cx="0" cy="0"/>
+          <a:chOff x="0" y="0"/>
+          <a:chExt cx="0" cy="0"/>
+        </a:xfrm>
+      </p:grpSpPr>
+      <p:sp>
+        <p:nvSpPr>
+          <p:cNvPr id="2" name="Text 0"/>
+          <p:cNvSpPr/>
+          <p:nvPr/>
+        </p:nvSpPr>
+        <p:spPr>
+          <a:xfrm>
+            <a:off x="0" y="0"/>
+            <a:ext cx="9144000" cy="101501"/>
+          </a:xfrm>
+          <a:prstGeom prst="rect">
+            <a:avLst/>
+          </a:prstGeom>
+          <a:solidFill>
+            <a:srgbClr val="5D1D2E"/>
+          </a:solidFill>
+          <a:ln/>
+        </p:spPr>
+        <p:txBody>
+          <a:bodyPr wrap="square" rtlCol="0" anchor="ctr"/>
+          <a:lstStyle/>
+          <a:p>
+            <a:pPr indent="0" marL="0">
+              <a:buNone/>
+            </a:pPr>
+            <a:endParaRPr lang="en-US" dirty="0"/>
+          </a:p>
+        </p:txBody>
+      </p:sp>
+      <p:sp>
+        <p:nvSpPr>
+          <p:cNvPr id="3" name="Text 1"/>
+          <p:cNvSpPr/>
+          <p:nvPr/>
+        </p:nvSpPr>
+        <p:spPr>
+          <a:xfrm>
+            <a:off x="406301" y="457051"/>
+            <a:ext cx="8498026" cy="274290"/>
+          </a:xfrm>
+          <a:prstGeom prst="rect">
+            <a:avLst/>
+          </a:prstGeom>
+          <a:noFill/>
+          <a:ln/>
+        </p:spPr>
+        <p:txBody>
+          <a:bodyPr wrap="square" lIns="0" tIns="0" rIns="0" bIns="0" rtlCol="0" anchor="t"/>
+          <a:lstStyle/>
+          <a:p>
+            <a:pPr algn="l" indent="0" marL="0">
+              <a:lnSpc>
+                <a:spcPts val="2160"/>
+              </a:lnSpc>
+              <a:spcBef>
+                <a:spcPts val="600"/>
+              </a:spcBef>
+              <a:spcAft>
+                <a:spcPts val="800"/>
+              </a:spcAft>
+              <a:buNone/>
+            </a:pPr>
+            <a:r>
+              <a:rPr lang="en-US" sz="1800" b="1" dirty="0">
+                <a:solidFill>
+                  <a:srgbClr val="997929"/>
+                </a:solidFill>
+                <a:latin typeface="Times New Roman" pitchFamily="34" charset="0"/>
+                <a:ea typeface="Times New Roman" pitchFamily="34" charset="-122"/>
+                <a:cs typeface="Times New Roman" pitchFamily="34" charset="-120"/>
+              </a:rPr>
+              <a:t>Core (25 min) (cont.)</a:t>
+            </a:r>
+            <a:endParaRPr lang="en-US" sz="1800" dirty="0"/>
+          </a:p>
+        </p:txBody>
+      </p:sp>
+      <p:sp>
+        <p:nvSpPr>
+          <p:cNvPr id="4" name="Text 2"/>
+          <p:cNvSpPr/>
+          <p:nvPr/>
+        </p:nvSpPr>
+        <p:spPr>
+          <a:xfrm>
+            <a:off x="634901" y="883593"/>
+            <a:ext cx="8102798" cy="1013222"/>
+          </a:xfrm>
+          <a:prstGeom prst="rect">
+            <a:avLst/>
+          </a:prstGeom>
+          <a:noFill/>
+          <a:ln/>
+        </p:spPr>
+        <p:txBody>
+          <a:bodyPr wrap="square" lIns="0" tIns="0" rIns="0" bIns="0" rtlCol="0" anchor="t"/>
+          <a:lstStyle/>
+          <a:p>
             <a:pPr algn="l" marL="342900" indent="-342900">
               <a:lnSpc>
                 <a:spcPts val="1620"/>
@@ -2294,6 +2993,26 @@
               <a:buChar char="•"/>
             </a:pPr>
             <a:r>
+              <a:rPr lang="en-US" sz="1200" b="1" dirty="0">
+                <a:solidFill>
+                  <a:srgbClr val="1A1A1A"/>
+                </a:solidFill>
+                <a:latin typeface="Georgia" pitchFamily="34" charset="0"/>
+                <a:ea typeface="Georgia" pitchFamily="34" charset="-122"/>
+                <a:cs typeface="Georgia" pitchFamily="34" charset="-120"/>
+              </a:rPr>
+              <a:t>"What predicts chemical behaviour?"</a:t>
+            </a:r>
+            <a:pPr algn="l" indent="0" marL="0">
+              <a:lnSpc>
+                <a:spcPts val="1620"/>
+              </a:lnSpc>
+              <a:spcAft>
+                <a:spcPts val="300"/>
+              </a:spcAft>
+              <a:buNone/>
+            </a:pPr>
+            <a:r>
               <a:rPr lang="en-US" sz="1200" dirty="0">
                 <a:solidFill>
                   <a:srgbClr val="1A1A1A"/>
@@ -2302,6 +3021,1521 @@
                 <a:ea typeface="Georgia" pitchFamily="34" charset="-122"/>
                 <a:cs typeface="Georgia" pitchFamily="34" charset="-120"/>
               </a:rPr>
+              <a:t> — Strong · Weak</a:t>
+            </a:r>
+            <a:endParaRPr lang="en-US" sz="1200" dirty="0"/>
+          </a:p>
+          <a:p>
+            <a:pPr algn="l" marL="342900" indent="-342900">
+              <a:lnSpc>
+                <a:spcPts val="1620"/>
+              </a:lnSpc>
+              <a:spcAft>
+                <a:spcPts val="300"/>
+              </a:spcAft>
+              <a:buSzPct val="100000"/>
+              <a:buChar char="•"/>
+            </a:pPr>
+            <a:r>
+              <a:rPr lang="en-US" sz="1200" b="1" dirty="0">
+                <a:solidFill>
+                  <a:srgbClr val="1A1A1A"/>
+                </a:solidFill>
+                <a:latin typeface="Georgia" pitchFamily="34" charset="0"/>
+                <a:ea typeface="Georgia" pitchFamily="34" charset="-122"/>
+                <a:cs typeface="Georgia" pitchFamily="34" charset="-120"/>
+              </a:rPr>
+              <a:t>"What categories does the everyday world come in?"</a:t>
+            </a:r>
+            <a:pPr algn="l" indent="0" marL="0">
+              <a:lnSpc>
+                <a:spcPts val="1620"/>
+              </a:lnSpc>
+              <a:spcAft>
+                <a:spcPts val="300"/>
+              </a:spcAft>
+              <a:buNone/>
+            </a:pPr>
+            <a:r>
+              <a:rPr lang="en-US" sz="1200" dirty="0">
+                <a:solidFill>
+                  <a:srgbClr val="1A1A1A"/>
+                </a:solidFill>
+                <a:latin typeface="Georgia" pitchFamily="34" charset="0"/>
+                <a:ea typeface="Georgia" pitchFamily="34" charset="-122"/>
+                <a:cs typeface="Georgia" pitchFamily="34" charset="-120"/>
+              </a:rPr>
+              <a:t> — Decent (states of matter) · Strong</a:t>
+            </a:r>
+            <a:endParaRPr lang="en-US" sz="1200" dirty="0"/>
+          </a:p>
+          <a:p>
+            <a:pPr algn="l" marL="342900" indent="-342900">
+              <a:lnSpc>
+                <a:spcPts val="1620"/>
+              </a:lnSpc>
+              <a:spcAft>
+                <a:spcPts val="300"/>
+              </a:spcAft>
+              <a:buSzPct val="100000"/>
+              <a:buChar char="•"/>
+            </a:pPr>
+            <a:r>
+              <a:rPr lang="en-US" sz="1200" b="1" dirty="0">
+                <a:solidFill>
+                  <a:srgbClr val="1A1A1A"/>
+                </a:solidFill>
+                <a:latin typeface="Georgia" pitchFamily="34" charset="0"/>
+                <a:ea typeface="Georgia" pitchFamily="34" charset="-122"/>
+                <a:cs typeface="Georgia" pitchFamily="34" charset="-120"/>
+              </a:rPr>
+              <a:t>"How does perception fit with reality?"</a:t>
+            </a:r>
+            <a:pPr algn="l" indent="0" marL="0">
+              <a:lnSpc>
+                <a:spcPts val="1620"/>
+              </a:lnSpc>
+              <a:spcAft>
+                <a:spcPts val="300"/>
+              </a:spcAft>
+              <a:buNone/>
+            </a:pPr>
+            <a:r>
+              <a:rPr lang="en-US" sz="1200" dirty="0">
+                <a:solidFill>
+                  <a:srgbClr val="1A1A1A"/>
+                </a:solidFill>
+                <a:latin typeface="Georgia" pitchFamily="34" charset="0"/>
+                <a:ea typeface="Georgia" pitchFamily="34" charset="-122"/>
+                <a:cs typeface="Georgia" pitchFamily="34" charset="-120"/>
+              </a:rPr>
+              <a:t> — Modern: neuroscience; not in chemistry · Strong (tanmātra–indriya)</a:t>
+            </a:r>
+            <a:endParaRPr lang="en-US" sz="1200" dirty="0"/>
+          </a:p>
+          <a:p>
+            <a:pPr algn="l" marL="342900" indent="-342900">
+              <a:lnSpc>
+                <a:spcPts val="1620"/>
+              </a:lnSpc>
+              <a:spcAft>
+                <a:spcPts val="300"/>
+              </a:spcAft>
+              <a:buSzPct val="100000"/>
+              <a:buChar char="•"/>
+            </a:pPr>
+            <a:r>
+              <a:rPr lang="en-US" sz="1200" b="1" dirty="0">
+                <a:solidFill>
+                  <a:srgbClr val="1A1A1A"/>
+                </a:solidFill>
+                <a:latin typeface="Georgia" pitchFamily="34" charset="0"/>
+                <a:ea typeface="Georgia" pitchFamily="34" charset="-122"/>
+                <a:cs typeface="Georgia" pitchFamily="34" charset="-120"/>
+              </a:rPr>
+              <a:t>"Where does consciousness fit?"</a:t>
+            </a:r>
+            <a:pPr algn="l" indent="0" marL="0">
+              <a:lnSpc>
+                <a:spcPts val="1620"/>
+              </a:lnSpc>
+              <a:spcAft>
+                <a:spcPts val="300"/>
+              </a:spcAft>
+              <a:buNone/>
+            </a:pPr>
+            <a:r>
+              <a:rPr lang="en-US" sz="1200" dirty="0">
+                <a:solidFill>
+                  <a:srgbClr val="1A1A1A"/>
+                </a:solidFill>
+                <a:latin typeface="Georgia" pitchFamily="34" charset="0"/>
+                <a:ea typeface="Georgia" pitchFamily="34" charset="-122"/>
+                <a:cs typeface="Georgia" pitchFamily="34" charset="-120"/>
+              </a:rPr>
+              <a:t> — Mostly bracketed · Central (puruṣa)</a:t>
+            </a:r>
+            <a:endParaRPr lang="en-US" sz="1200" dirty="0"/>
+          </a:p>
+        </p:txBody>
+      </p:sp>
+      <p:sp>
+        <p:nvSpPr>
+          <p:cNvPr id="5" name="Text 3"/>
+          <p:cNvSpPr/>
+          <p:nvPr/>
+        </p:nvSpPr>
+        <p:spPr>
+          <a:xfrm>
+            <a:off x="406301" y="4434929"/>
+            <a:ext cx="8498026" cy="213271"/>
+          </a:xfrm>
+          <a:prstGeom prst="rect">
+            <a:avLst/>
+          </a:prstGeom>
+          <a:noFill/>
+          <a:ln/>
+        </p:spPr>
+        <p:txBody>
+          <a:bodyPr wrap="square" lIns="0" tIns="0" rIns="0" bIns="0" rtlCol="0" anchor="t"/>
+          <a:lstStyle/>
+          <a:p>
+            <a:pPr algn="l" indent="0" marL="0">
+              <a:lnSpc>
+                <a:spcPts val="1680"/>
+              </a:lnSpc>
+              <a:spcBef>
+                <a:spcPts val="300"/>
+              </a:spcBef>
+              <a:spcAft>
+                <a:spcPts val="300"/>
+              </a:spcAft>
+              <a:buNone/>
+            </a:pPr>
+            <a:r>
+              <a:rPr lang="en-US" sz="1200" dirty="0">
+                <a:solidFill>
+                  <a:srgbClr val="1A1A1A"/>
+                </a:solidFill>
+                <a:latin typeface="Georgia" pitchFamily="34" charset="0"/>
+                <a:ea typeface="Georgia" pitchFamily="34" charset="-122"/>
+                <a:cs typeface="Georgia" pitchFamily="34" charset="-120"/>
+              </a:rPr>
+              <a:t>Senior ·  · IKS Curriculum</a:t>
+            </a:r>
+            <a:endParaRPr lang="en-US" sz="1200" dirty="0"/>
+          </a:p>
+        </p:txBody>
+      </p:sp>
+    </p:spTree>
+  </p:cSld>
+  <p:clrMapOvr>
+    <a:masterClrMapping/>
+  </p:clrMapOvr>
+</p:sld>
+</file>
+
+<file path=ppt/slides/slide12.xml><?xml version="1.0" encoding="utf-8"?>
+<p:sld xmlns:a="http://schemas.openxmlformats.org/drawingml/2006/main" xmlns:r="http://schemas.openxmlformats.org/officeDocument/2006/relationships" xmlns:p="http://schemas.openxmlformats.org/presentationml/2006/main">
+  <p:cSld name="Slide 12">
+    <p:bg>
+      <p:bgPr>
+        <a:solidFill>
+          <a:srgbClr val="FAF7F2"/>
+        </a:solidFill>
+      </p:bgPr>
+    </p:bg>
+    <p:spTree>
+      <p:nvGrpSpPr>
+        <p:cNvPr id="1" name=""/>
+        <p:cNvGrpSpPr/>
+        <p:nvPr/>
+      </p:nvGrpSpPr>
+      <p:grpSpPr>
+        <a:xfrm>
+          <a:off x="0" y="0"/>
+          <a:ext cx="0" cy="0"/>
+          <a:chOff x="0" y="0"/>
+          <a:chExt cx="0" cy="0"/>
+        </a:xfrm>
+      </p:grpSpPr>
+      <p:sp>
+        <p:nvSpPr>
+          <p:cNvPr id="2" name="Text 0"/>
+          <p:cNvSpPr/>
+          <p:nvPr/>
+        </p:nvSpPr>
+        <p:spPr>
+          <a:xfrm>
+            <a:off x="0" y="0"/>
+            <a:ext cx="9144000" cy="101501"/>
+          </a:xfrm>
+          <a:prstGeom prst="rect">
+            <a:avLst/>
+          </a:prstGeom>
+          <a:solidFill>
+            <a:srgbClr val="5D1D2E"/>
+          </a:solidFill>
+          <a:ln/>
+        </p:spPr>
+        <p:txBody>
+          <a:bodyPr wrap="square" rtlCol="0" anchor="ctr"/>
+          <a:lstStyle/>
+          <a:p>
+            <a:pPr indent="0" marL="0">
+              <a:buNone/>
+            </a:pPr>
+            <a:endParaRPr lang="en-US" dirty="0"/>
+          </a:p>
+        </p:txBody>
+      </p:sp>
+      <p:sp>
+        <p:nvSpPr>
+          <p:cNvPr id="3" name="Text 1"/>
+          <p:cNvSpPr/>
+          <p:nvPr/>
+        </p:nvSpPr>
+        <p:spPr>
+          <a:xfrm>
+            <a:off x="406301" y="457051"/>
+            <a:ext cx="8498026" cy="274290"/>
+          </a:xfrm>
+          <a:prstGeom prst="rect">
+            <a:avLst/>
+          </a:prstGeom>
+          <a:noFill/>
+          <a:ln/>
+        </p:spPr>
+        <p:txBody>
+          <a:bodyPr wrap="square" lIns="0" tIns="0" rIns="0" bIns="0" rtlCol="0" anchor="t"/>
+          <a:lstStyle/>
+          <a:p>
+            <a:pPr algn="l" indent="0" marL="0">
+              <a:lnSpc>
+                <a:spcPts val="2160"/>
+              </a:lnSpc>
+              <a:spcBef>
+                <a:spcPts val="600"/>
+              </a:spcBef>
+              <a:spcAft>
+                <a:spcPts val="800"/>
+              </a:spcAft>
+              <a:buNone/>
+            </a:pPr>
+            <a:r>
+              <a:rPr lang="en-US" sz="1800" b="1" dirty="0">
+                <a:solidFill>
+                  <a:srgbClr val="997929"/>
+                </a:solidFill>
+                <a:latin typeface="Times New Roman" pitchFamily="34" charset="0"/>
+                <a:ea typeface="Times New Roman" pitchFamily="34" charset="-122"/>
+                <a:cs typeface="Times New Roman" pitchFamily="34" charset="-120"/>
+              </a:rPr>
+              <a:t>Reflection writing (10 min)</a:t>
+            </a:r>
+            <a:endParaRPr lang="en-US" sz="1800" dirty="0"/>
+          </a:p>
+        </p:txBody>
+      </p:sp>
+      <p:sp>
+        <p:nvSpPr>
+          <p:cNvPr id="4" name="Text 2"/>
+          <p:cNvSpPr/>
+          <p:nvPr/>
+        </p:nvSpPr>
+        <p:spPr>
+          <a:xfrm>
+            <a:off x="406301" y="870942"/>
+            <a:ext cx="8498026" cy="639812"/>
+          </a:xfrm>
+          <a:prstGeom prst="rect">
+            <a:avLst/>
+          </a:prstGeom>
+          <a:noFill/>
+          <a:ln/>
+        </p:spPr>
+        <p:txBody>
+          <a:bodyPr wrap="square" lIns="0" tIns="0" rIns="0" bIns="0" rtlCol="0" anchor="t"/>
+          <a:lstStyle/>
+          <a:p>
+            <a:pPr algn="l" indent="0" marL="0">
+              <a:lnSpc>
+                <a:spcPts val="1680"/>
+              </a:lnSpc>
+              <a:spcBef>
+                <a:spcPts val="300"/>
+              </a:spcBef>
+              <a:spcAft>
+                <a:spcPts val="300"/>
+              </a:spcAft>
+              <a:buNone/>
+            </a:pPr>
+            <a:r>
+              <a:rPr lang="en-US" sz="1200" dirty="0">
+                <a:solidFill>
+                  <a:srgbClr val="1A1A1A"/>
+                </a:solidFill>
+                <a:latin typeface="Georgia" pitchFamily="34" charset="0"/>
+                <a:ea typeface="Georgia" pitchFamily="34" charset="-122"/>
+                <a:cs typeface="Georgia" pitchFamily="34" charset="-120"/>
+              </a:rPr>
+              <a:t>5-minute quick-write: </a:t>
+            </a:r>
+            <a:pPr algn="l" indent="0" marL="0">
+              <a:lnSpc>
+                <a:spcPts val="1680"/>
+              </a:lnSpc>
+              <a:spcBef>
+                <a:spcPts val="300"/>
+              </a:spcBef>
+              <a:spcAft>
+                <a:spcPts val="300"/>
+              </a:spcAft>
+              <a:buNone/>
+            </a:pPr>
+            <a:r>
+              <a:rPr lang="en-US" sz="1200" i="1" dirty="0">
+                <a:solidFill>
+                  <a:srgbClr val="1A1A1A"/>
+                </a:solidFill>
+                <a:latin typeface="Georgia" pitchFamily="34" charset="0"/>
+                <a:ea typeface="Georgia" pitchFamily="34" charset="-122"/>
+                <a:cs typeface="Georgia" pitchFamily="34" charset="-120"/>
+              </a:rPr>
+              <a:t>"For one question above where Sāṅkhya is 'Strong' but modern science is 'Mostly bracketed' or 'Weak,' do you think this is a real intellectual asset of the Sāṅkhya scheme, or a leftover of pre-scientific guessing? Defend your position in 4–5 sentences."</a:t>
+            </a:r>
+            <a:endParaRPr lang="en-US" sz="1200" dirty="0"/>
+          </a:p>
+        </p:txBody>
+      </p:sp>
+      <p:sp>
+        <p:nvSpPr>
+          <p:cNvPr id="5" name="Text 3"/>
+          <p:cNvSpPr/>
+          <p:nvPr/>
+        </p:nvSpPr>
+        <p:spPr>
+          <a:xfrm>
+            <a:off x="406301" y="4434929"/>
+            <a:ext cx="8498026" cy="213271"/>
+          </a:xfrm>
+          <a:prstGeom prst="rect">
+            <a:avLst/>
+          </a:prstGeom>
+          <a:noFill/>
+          <a:ln/>
+        </p:spPr>
+        <p:txBody>
+          <a:bodyPr wrap="square" lIns="0" tIns="0" rIns="0" bIns="0" rtlCol="0" anchor="t"/>
+          <a:lstStyle/>
+          <a:p>
+            <a:pPr algn="l" indent="0" marL="0">
+              <a:lnSpc>
+                <a:spcPts val="1680"/>
+              </a:lnSpc>
+              <a:spcBef>
+                <a:spcPts val="300"/>
+              </a:spcBef>
+              <a:spcAft>
+                <a:spcPts val="300"/>
+              </a:spcAft>
+              <a:buNone/>
+            </a:pPr>
+            <a:r>
+              <a:rPr lang="en-US" sz="1200" dirty="0">
+                <a:solidFill>
+                  <a:srgbClr val="1A1A1A"/>
+                </a:solidFill>
+                <a:latin typeface="Georgia" pitchFamily="34" charset="0"/>
+                <a:ea typeface="Georgia" pitchFamily="34" charset="-122"/>
+                <a:cs typeface="Georgia" pitchFamily="34" charset="-120"/>
+              </a:rPr>
+              <a:t>Senior ·  · IKS Curriculum</a:t>
+            </a:r>
+            <a:endParaRPr lang="en-US" sz="1200" dirty="0"/>
+          </a:p>
+        </p:txBody>
+      </p:sp>
+    </p:spTree>
+  </p:cSld>
+  <p:clrMapOvr>
+    <a:masterClrMapping/>
+  </p:clrMapOvr>
+</p:sld>
+</file>
+
+<file path=ppt/slides/slide13.xml><?xml version="1.0" encoding="utf-8"?>
+<p:sld xmlns:a="http://schemas.openxmlformats.org/drawingml/2006/main" xmlns:r="http://schemas.openxmlformats.org/officeDocument/2006/relationships" xmlns:p="http://schemas.openxmlformats.org/presentationml/2006/main">
+  <p:cSld name="Slide 13">
+    <p:bg>
+      <p:bgPr>
+        <a:solidFill>
+          <a:srgbClr val="FAF7F2"/>
+        </a:solidFill>
+      </p:bgPr>
+    </p:bg>
+    <p:spTree>
+      <p:nvGrpSpPr>
+        <p:cNvPr id="1" name=""/>
+        <p:cNvGrpSpPr/>
+        <p:nvPr/>
+      </p:nvGrpSpPr>
+      <p:grpSpPr>
+        <a:xfrm>
+          <a:off x="0" y="0"/>
+          <a:ext cx="0" cy="0"/>
+          <a:chOff x="0" y="0"/>
+          <a:chExt cx="0" cy="0"/>
+        </a:xfrm>
+      </p:grpSpPr>
+      <p:sp>
+        <p:nvSpPr>
+          <p:cNvPr id="2" name="Text 0"/>
+          <p:cNvSpPr/>
+          <p:nvPr/>
+        </p:nvSpPr>
+        <p:spPr>
+          <a:xfrm>
+            <a:off x="0" y="0"/>
+            <a:ext cx="9144000" cy="101501"/>
+          </a:xfrm>
+          <a:prstGeom prst="rect">
+            <a:avLst/>
+          </a:prstGeom>
+          <a:solidFill>
+            <a:srgbClr val="5D1D2E"/>
+          </a:solidFill>
+          <a:ln/>
+        </p:spPr>
+        <p:txBody>
+          <a:bodyPr wrap="square" rtlCol="0" anchor="ctr"/>
+          <a:lstStyle/>
+          <a:p>
+            <a:pPr indent="0" marL="0">
+              <a:buNone/>
+            </a:pPr>
+            <a:endParaRPr lang="en-US" dirty="0"/>
+          </a:p>
+        </p:txBody>
+      </p:sp>
+      <p:sp>
+        <p:nvSpPr>
+          <p:cNvPr id="3" name="Text 1"/>
+          <p:cNvSpPr/>
+          <p:nvPr/>
+        </p:nvSpPr>
+        <p:spPr>
+          <a:xfrm>
+            <a:off x="406301" y="457051"/>
+            <a:ext cx="8498026" cy="274290"/>
+          </a:xfrm>
+          <a:prstGeom prst="rect">
+            <a:avLst/>
+          </a:prstGeom>
+          <a:noFill/>
+          <a:ln/>
+        </p:spPr>
+        <p:txBody>
+          <a:bodyPr wrap="square" lIns="0" tIns="0" rIns="0" bIns="0" rtlCol="0" anchor="t"/>
+          <a:lstStyle/>
+          <a:p>
+            <a:pPr algn="l" indent="0" marL="0">
+              <a:lnSpc>
+                <a:spcPts val="2160"/>
+              </a:lnSpc>
+              <a:spcBef>
+                <a:spcPts val="600"/>
+              </a:spcBef>
+              <a:spcAft>
+                <a:spcPts val="800"/>
+              </a:spcAft>
+              <a:buNone/>
+            </a:pPr>
+            <a:r>
+              <a:rPr lang="en-US" sz="1800" b="1" dirty="0">
+                <a:solidFill>
+                  <a:srgbClr val="997929"/>
+                </a:solidFill>
+                <a:latin typeface="Times New Roman" pitchFamily="34" charset="0"/>
+                <a:ea typeface="Times New Roman" pitchFamily="34" charset="-122"/>
+                <a:cs typeface="Times New Roman" pitchFamily="34" charset="-120"/>
+              </a:rPr>
+              <a:t>Discussion (5 min)</a:t>
+            </a:r>
+            <a:endParaRPr lang="en-US" sz="1800" dirty="0"/>
+          </a:p>
+        </p:txBody>
+      </p:sp>
+      <p:sp>
+        <p:nvSpPr>
+          <p:cNvPr id="4" name="Text 2"/>
+          <p:cNvSpPr/>
+          <p:nvPr/>
+        </p:nvSpPr>
+        <p:spPr>
+          <a:xfrm>
+            <a:off x="406301" y="870942"/>
+            <a:ext cx="8498026" cy="213271"/>
+          </a:xfrm>
+          <a:prstGeom prst="rect">
+            <a:avLst/>
+          </a:prstGeom>
+          <a:noFill/>
+          <a:ln/>
+        </p:spPr>
+        <p:txBody>
+          <a:bodyPr wrap="square" lIns="0" tIns="0" rIns="0" bIns="0" rtlCol="0" anchor="t"/>
+          <a:lstStyle/>
+          <a:p>
+            <a:pPr algn="l" indent="0" marL="0">
+              <a:lnSpc>
+                <a:spcPts val="1680"/>
+              </a:lnSpc>
+              <a:spcBef>
+                <a:spcPts val="300"/>
+              </a:spcBef>
+              <a:spcAft>
+                <a:spcPts val="300"/>
+              </a:spcAft>
+              <a:buNone/>
+            </a:pPr>
+            <a:r>
+              <a:rPr lang="en-US" sz="1200" dirty="0">
+                <a:solidFill>
+                  <a:srgbClr val="1A1A1A"/>
+                </a:solidFill>
+                <a:latin typeface="Georgia" pitchFamily="34" charset="0"/>
+                <a:ea typeface="Georgia" pitchFamily="34" charset="-122"/>
+                <a:cs typeface="Georgia" pitchFamily="34" charset="-120"/>
+              </a:rPr>
+              <a:t>3 students share their position. Note the diversity of views.</a:t>
+            </a:r>
+            <a:endParaRPr lang="en-US" sz="1200" dirty="0"/>
+          </a:p>
+        </p:txBody>
+      </p:sp>
+      <p:sp>
+        <p:nvSpPr>
+          <p:cNvPr id="5" name="Text 3"/>
+          <p:cNvSpPr/>
+          <p:nvPr/>
+        </p:nvSpPr>
+        <p:spPr>
+          <a:xfrm>
+            <a:off x="406301" y="4434929"/>
+            <a:ext cx="8498026" cy="213271"/>
+          </a:xfrm>
+          <a:prstGeom prst="rect">
+            <a:avLst/>
+          </a:prstGeom>
+          <a:noFill/>
+          <a:ln/>
+        </p:spPr>
+        <p:txBody>
+          <a:bodyPr wrap="square" lIns="0" tIns="0" rIns="0" bIns="0" rtlCol="0" anchor="t"/>
+          <a:lstStyle/>
+          <a:p>
+            <a:pPr algn="l" indent="0" marL="0">
+              <a:lnSpc>
+                <a:spcPts val="1680"/>
+              </a:lnSpc>
+              <a:spcBef>
+                <a:spcPts val="300"/>
+              </a:spcBef>
+              <a:spcAft>
+                <a:spcPts val="300"/>
+              </a:spcAft>
+              <a:buNone/>
+            </a:pPr>
+            <a:r>
+              <a:rPr lang="en-US" sz="1200" dirty="0">
+                <a:solidFill>
+                  <a:srgbClr val="1A1A1A"/>
+                </a:solidFill>
+                <a:latin typeface="Georgia" pitchFamily="34" charset="0"/>
+                <a:ea typeface="Georgia" pitchFamily="34" charset="-122"/>
+                <a:cs typeface="Georgia" pitchFamily="34" charset="-120"/>
+              </a:rPr>
+              <a:t>Senior ·  · IKS Curriculum</a:t>
+            </a:r>
+            <a:endParaRPr lang="en-US" sz="1200" dirty="0"/>
+          </a:p>
+        </p:txBody>
+      </p:sp>
+    </p:spTree>
+  </p:cSld>
+  <p:clrMapOvr>
+    <a:masterClrMapping/>
+  </p:clrMapOvr>
+</p:sld>
+</file>
+
+<file path=ppt/slides/slide14.xml><?xml version="1.0" encoding="utf-8"?>
+<p:sld xmlns:a="http://schemas.openxmlformats.org/drawingml/2006/main" xmlns:r="http://schemas.openxmlformats.org/officeDocument/2006/relationships" xmlns:p="http://schemas.openxmlformats.org/presentationml/2006/main">
+  <p:cSld name="Slide 14">
+    <p:bg>
+      <p:bgPr>
+        <a:solidFill>
+          <a:srgbClr val="FAF7F2"/>
+        </a:solidFill>
+      </p:bgPr>
+    </p:bg>
+    <p:spTree>
+      <p:nvGrpSpPr>
+        <p:cNvPr id="1" name=""/>
+        <p:cNvGrpSpPr/>
+        <p:nvPr/>
+      </p:nvGrpSpPr>
+      <p:grpSpPr>
+        <a:xfrm>
+          <a:off x="0" y="0"/>
+          <a:ext cx="0" cy="0"/>
+          <a:chOff x="0" y="0"/>
+          <a:chExt cx="0" cy="0"/>
+        </a:xfrm>
+      </p:grpSpPr>
+      <p:sp>
+        <p:nvSpPr>
+          <p:cNvPr id="2" name="Text 0"/>
+          <p:cNvSpPr/>
+          <p:nvPr/>
+        </p:nvSpPr>
+        <p:spPr>
+          <a:xfrm>
+            <a:off x="0" y="0"/>
+            <a:ext cx="9144000" cy="101501"/>
+          </a:xfrm>
+          <a:prstGeom prst="rect">
+            <a:avLst/>
+          </a:prstGeom>
+          <a:solidFill>
+            <a:srgbClr val="5D1D2E"/>
+          </a:solidFill>
+          <a:ln/>
+        </p:spPr>
+        <p:txBody>
+          <a:bodyPr wrap="square" rtlCol="0" anchor="ctr"/>
+          <a:lstStyle/>
+          <a:p>
+            <a:pPr indent="0" marL="0">
+              <a:buNone/>
+            </a:pPr>
+            <a:endParaRPr lang="en-US" dirty="0"/>
+          </a:p>
+        </p:txBody>
+      </p:sp>
+      <p:sp>
+        <p:nvSpPr>
+          <p:cNvPr id="3" name="Text 1"/>
+          <p:cNvSpPr/>
+          <p:nvPr/>
+        </p:nvSpPr>
+        <p:spPr>
+          <a:xfrm>
+            <a:off x="406301" y="457051"/>
+            <a:ext cx="8498026" cy="274290"/>
+          </a:xfrm>
+          <a:prstGeom prst="rect">
+            <a:avLst/>
+          </a:prstGeom>
+          <a:noFill/>
+          <a:ln/>
+        </p:spPr>
+        <p:txBody>
+          <a:bodyPr wrap="square" lIns="0" tIns="0" rIns="0" bIns="0" rtlCol="0" anchor="t"/>
+          <a:lstStyle/>
+          <a:p>
+            <a:pPr algn="l" indent="0" marL="0">
+              <a:lnSpc>
+                <a:spcPts val="2160"/>
+              </a:lnSpc>
+              <a:spcBef>
+                <a:spcPts val="600"/>
+              </a:spcBef>
+              <a:spcAft>
+                <a:spcPts val="800"/>
+              </a:spcAft>
+              <a:buNone/>
+            </a:pPr>
+            <a:r>
+              <a:rPr lang="en-US" sz="1800" b="1" dirty="0">
+                <a:solidFill>
+                  <a:srgbClr val="997929"/>
+                </a:solidFill>
+                <a:latin typeface="Times New Roman" pitchFamily="34" charset="0"/>
+                <a:ea typeface="Times New Roman" pitchFamily="34" charset="-122"/>
+                <a:cs typeface="Times New Roman" pitchFamily="34" charset="-120"/>
+              </a:rPr>
+              <a:t>Wrap-up (5 min)</a:t>
+            </a:r>
+            <a:endParaRPr lang="en-US" sz="1800" dirty="0"/>
+          </a:p>
+        </p:txBody>
+      </p:sp>
+      <p:sp>
+        <p:nvSpPr>
+          <p:cNvPr id="4" name="Text 2"/>
+          <p:cNvSpPr/>
+          <p:nvPr/>
+        </p:nvSpPr>
+        <p:spPr>
+          <a:xfrm>
+            <a:off x="634901" y="883593"/>
+            <a:ext cx="8102798" cy="281880"/>
+          </a:xfrm>
+          <a:prstGeom prst="rect">
+            <a:avLst/>
+          </a:prstGeom>
+          <a:noFill/>
+          <a:ln/>
+        </p:spPr>
+        <p:txBody>
+          <a:bodyPr wrap="square" lIns="0" tIns="0" rIns="0" bIns="0" rtlCol="0" anchor="t"/>
+          <a:lstStyle/>
+          <a:p>
+            <a:pPr algn="l" marL="342900" indent="-342900">
+              <a:lnSpc>
+                <a:spcPts val="1620"/>
+              </a:lnSpc>
+              <a:spcAft>
+                <a:spcPts val="300"/>
+              </a:spcAft>
+              <a:buSzPct val="100000"/>
+              <a:buChar char="•"/>
+            </a:pPr>
+            <a:r>
+              <a:rPr lang="en-US" sz="1200" dirty="0">
+                <a:solidFill>
+                  <a:srgbClr val="1A1A1A"/>
+                </a:solidFill>
+                <a:latin typeface="Georgia" pitchFamily="34" charset="0"/>
+                <a:ea typeface="Georgia" pitchFamily="34" charset="-122"/>
+                <a:cs typeface="Georgia" pitchFamily="34" charset="-120"/>
+              </a:rPr>
+              <a:t>Preview Day 7: </a:t>
+            </a:r>
+            <a:pPr algn="l" indent="0" marL="0">
+              <a:lnSpc>
+                <a:spcPts val="1620"/>
+              </a:lnSpc>
+              <a:spcAft>
+                <a:spcPts val="300"/>
+              </a:spcAft>
+              <a:buNone/>
+            </a:pPr>
+            <a:r>
+              <a:rPr lang="en-US" sz="1200" i="1" dirty="0">
+                <a:solidFill>
+                  <a:srgbClr val="1A1A1A"/>
+                </a:solidFill>
+                <a:latin typeface="Georgia" pitchFamily="34" charset="0"/>
+                <a:ea typeface="Georgia" pitchFamily="34" charset="-122"/>
+                <a:cs typeface="Georgia" pitchFamily="34" charset="-120"/>
+              </a:rPr>
+              <a:t>"Tomorrow — group debate. Should IKS be integrated into mainstream science class?"</a:t>
+            </a:r>
+            <a:endParaRPr lang="en-US" sz="1200" dirty="0"/>
+          </a:p>
+        </p:txBody>
+      </p:sp>
+      <p:sp>
+        <p:nvSpPr>
+          <p:cNvPr id="5" name="Text 3"/>
+          <p:cNvSpPr/>
+          <p:nvPr/>
+        </p:nvSpPr>
+        <p:spPr>
+          <a:xfrm>
+            <a:off x="406301" y="4434929"/>
+            <a:ext cx="8498026" cy="213271"/>
+          </a:xfrm>
+          <a:prstGeom prst="rect">
+            <a:avLst/>
+          </a:prstGeom>
+          <a:noFill/>
+          <a:ln/>
+        </p:spPr>
+        <p:txBody>
+          <a:bodyPr wrap="square" lIns="0" tIns="0" rIns="0" bIns="0" rtlCol="0" anchor="t"/>
+          <a:lstStyle/>
+          <a:p>
+            <a:pPr algn="l" indent="0" marL="0">
+              <a:lnSpc>
+                <a:spcPts val="1680"/>
+              </a:lnSpc>
+              <a:spcBef>
+                <a:spcPts val="300"/>
+              </a:spcBef>
+              <a:spcAft>
+                <a:spcPts val="300"/>
+              </a:spcAft>
+              <a:buNone/>
+            </a:pPr>
+            <a:r>
+              <a:rPr lang="en-US" sz="1200" dirty="0">
+                <a:solidFill>
+                  <a:srgbClr val="1A1A1A"/>
+                </a:solidFill>
+                <a:latin typeface="Georgia" pitchFamily="34" charset="0"/>
+                <a:ea typeface="Georgia" pitchFamily="34" charset="-122"/>
+                <a:cs typeface="Georgia" pitchFamily="34" charset="-120"/>
+              </a:rPr>
+              <a:t>Senior ·  · IKS Curriculum</a:t>
+            </a:r>
+            <a:endParaRPr lang="en-US" sz="1200" dirty="0"/>
+          </a:p>
+        </p:txBody>
+      </p:sp>
+    </p:spTree>
+  </p:cSld>
+  <p:clrMapOvr>
+    <a:masterClrMapping/>
+  </p:clrMapOvr>
+</p:sld>
+</file>
+
+<file path=ppt/slides/slide15.xml><?xml version="1.0" encoding="utf-8"?>
+<p:sld xmlns:a="http://schemas.openxmlformats.org/drawingml/2006/main" xmlns:r="http://schemas.openxmlformats.org/officeDocument/2006/relationships" xmlns:p="http://schemas.openxmlformats.org/presentationml/2006/main">
+  <p:cSld name="Slide 15">
+    <p:bg>
+      <p:bgPr>
+        <a:solidFill>
+          <a:srgbClr val="FAF7F2"/>
+        </a:solidFill>
+      </p:bgPr>
+    </p:bg>
+    <p:spTree>
+      <p:nvGrpSpPr>
+        <p:cNvPr id="1" name=""/>
+        <p:cNvGrpSpPr/>
+        <p:nvPr/>
+      </p:nvGrpSpPr>
+      <p:grpSpPr>
+        <a:xfrm>
+          <a:off x="0" y="0"/>
+          <a:ext cx="0" cy="0"/>
+          <a:chOff x="0" y="0"/>
+          <a:chExt cx="0" cy="0"/>
+        </a:xfrm>
+      </p:grpSpPr>
+      <p:sp>
+        <p:nvSpPr>
+          <p:cNvPr id="2" name="Text 0"/>
+          <p:cNvSpPr/>
+          <p:nvPr/>
+        </p:nvSpPr>
+        <p:spPr>
+          <a:xfrm>
+            <a:off x="0" y="0"/>
+            <a:ext cx="9144000" cy="101501"/>
+          </a:xfrm>
+          <a:prstGeom prst="rect">
+            <a:avLst/>
+          </a:prstGeom>
+          <a:solidFill>
+            <a:srgbClr val="5D1D2E"/>
+          </a:solidFill>
+          <a:ln/>
+        </p:spPr>
+        <p:txBody>
+          <a:bodyPr wrap="square" rtlCol="0" anchor="ctr"/>
+          <a:lstStyle/>
+          <a:p>
+            <a:pPr indent="0" marL="0">
+              <a:buNone/>
+            </a:pPr>
+            <a:endParaRPr lang="en-US" dirty="0"/>
+          </a:p>
+        </p:txBody>
+      </p:sp>
+      <p:sp>
+        <p:nvSpPr>
+          <p:cNvPr id="3" name="Text 1"/>
+          <p:cNvSpPr/>
+          <p:nvPr/>
+        </p:nvSpPr>
+        <p:spPr>
+          <a:xfrm>
+            <a:off x="406301" y="457051"/>
+            <a:ext cx="8498026" cy="274290"/>
+          </a:xfrm>
+          <a:prstGeom prst="rect">
+            <a:avLst/>
+          </a:prstGeom>
+          <a:noFill/>
+          <a:ln/>
+        </p:spPr>
+        <p:txBody>
+          <a:bodyPr wrap="square" lIns="0" tIns="0" rIns="0" bIns="0" rtlCol="0" anchor="t"/>
+          <a:lstStyle/>
+          <a:p>
+            <a:pPr algn="l" indent="0" marL="0">
+              <a:lnSpc>
+                <a:spcPts val="2160"/>
+              </a:lnSpc>
+              <a:spcBef>
+                <a:spcPts val="600"/>
+              </a:spcBef>
+              <a:spcAft>
+                <a:spcPts val="800"/>
+              </a:spcAft>
+              <a:buNone/>
+            </a:pPr>
+            <a:r>
+              <a:rPr lang="en-US" sz="1800" b="1" dirty="0">
+                <a:solidFill>
+                  <a:srgbClr val="997929"/>
+                </a:solidFill>
+                <a:latin typeface="Times New Roman" pitchFamily="34" charset="0"/>
+                <a:ea typeface="Times New Roman" pitchFamily="34" charset="-122"/>
+                <a:cs typeface="Times New Roman" pitchFamily="34" charset="-120"/>
+              </a:rPr>
+              <a:t>Differentiation</a:t>
+            </a:r>
+            <a:endParaRPr lang="en-US" sz="1800" dirty="0"/>
+          </a:p>
+        </p:txBody>
+      </p:sp>
+      <p:sp>
+        <p:nvSpPr>
+          <p:cNvPr id="4" name="Text 2"/>
+          <p:cNvSpPr/>
+          <p:nvPr/>
+        </p:nvSpPr>
+        <p:spPr>
+          <a:xfrm>
+            <a:off x="634901" y="883593"/>
+            <a:ext cx="8102798" cy="731341"/>
+          </a:xfrm>
+          <a:prstGeom prst="rect">
+            <a:avLst/>
+          </a:prstGeom>
+          <a:noFill/>
+          <a:ln/>
+        </p:spPr>
+        <p:txBody>
+          <a:bodyPr wrap="square" lIns="0" tIns="0" rIns="0" bIns="0" rtlCol="0" anchor="t"/>
+          <a:lstStyle/>
+          <a:p>
+            <a:pPr algn="l" marL="342900" indent="-342900">
+              <a:lnSpc>
+                <a:spcPts val="1620"/>
+              </a:lnSpc>
+              <a:spcAft>
+                <a:spcPts val="300"/>
+              </a:spcAft>
+              <a:buSzPct val="100000"/>
+              <a:buChar char="•"/>
+            </a:pPr>
+            <a:r>
+              <a:rPr lang="en-US" sz="1200" b="1" dirty="0">
+                <a:solidFill>
+                  <a:srgbClr val="1A1A1A"/>
+                </a:solidFill>
+                <a:latin typeface="Georgia" pitchFamily="34" charset="0"/>
+                <a:ea typeface="Georgia" pitchFamily="34" charset="-122"/>
+                <a:cs typeface="Georgia" pitchFamily="34" charset="-120"/>
+              </a:rPr>
+              <a:t>Tier up:</a:t>
+            </a:r>
+            <a:pPr algn="l" indent="0" marL="0">
+              <a:lnSpc>
+                <a:spcPts val="1620"/>
+              </a:lnSpc>
+              <a:spcAft>
+                <a:spcPts val="300"/>
+              </a:spcAft>
+              <a:buNone/>
+            </a:pPr>
+            <a:r>
+              <a:rPr lang="en-US" sz="1200" dirty="0">
+                <a:solidFill>
+                  <a:srgbClr val="1A1A1A"/>
+                </a:solidFill>
+                <a:latin typeface="Georgia" pitchFamily="34" charset="0"/>
+                <a:ea typeface="Georgia" pitchFamily="34" charset="-122"/>
+                <a:cs typeface="Georgia" pitchFamily="34" charset="-120"/>
+              </a:rPr>
+              <a:t> Read Thomas Nagel's "What Is It Like to Be a Bat?" — write 1 paragraph on whether Sāṅkhya's tanmātra-indriya symmetry maps onto Nagel's "subjective experience" question.</a:t>
+            </a:r>
+            <a:endParaRPr lang="en-US" sz="1200" dirty="0"/>
+          </a:p>
+          <a:p>
+            <a:pPr algn="l" marL="342900" indent="-342900">
+              <a:lnSpc>
+                <a:spcPts val="1620"/>
+              </a:lnSpc>
+              <a:spcAft>
+                <a:spcPts val="300"/>
+              </a:spcAft>
+              <a:buSzPct val="100000"/>
+              <a:buChar char="•"/>
+            </a:pPr>
+            <a:r>
+              <a:rPr lang="en-US" sz="1200" b="1" dirty="0">
+                <a:solidFill>
+                  <a:srgbClr val="1A1A1A"/>
+                </a:solidFill>
+                <a:latin typeface="Georgia" pitchFamily="34" charset="0"/>
+                <a:ea typeface="Georgia" pitchFamily="34" charset="-122"/>
+                <a:cs typeface="Georgia" pitchFamily="34" charset="-120"/>
+              </a:rPr>
+              <a:t>Tier down:</a:t>
+            </a:r>
+            <a:pPr algn="l" indent="0" marL="0">
+              <a:lnSpc>
+                <a:spcPts val="1620"/>
+              </a:lnSpc>
+              <a:spcAft>
+                <a:spcPts val="300"/>
+              </a:spcAft>
+              <a:buNone/>
+            </a:pPr>
+            <a:r>
+              <a:rPr lang="en-US" sz="1200" dirty="0">
+                <a:solidFill>
+                  <a:srgbClr val="1A1A1A"/>
+                </a:solidFill>
+                <a:latin typeface="Georgia" pitchFamily="34" charset="0"/>
+                <a:ea typeface="Georgia" pitchFamily="34" charset="-122"/>
+                <a:cs typeface="Georgia" pitchFamily="34" charset="-120"/>
+              </a:rPr>
+              <a:t> Stick to the comparison table; the quick-write can be 2–3 sentences.</a:t>
+            </a:r>
+            <a:endParaRPr lang="en-US" sz="1200" dirty="0"/>
+          </a:p>
+        </p:txBody>
+      </p:sp>
+      <p:sp>
+        <p:nvSpPr>
+          <p:cNvPr id="5" name="Text 3"/>
+          <p:cNvSpPr/>
+          <p:nvPr/>
+        </p:nvSpPr>
+        <p:spPr>
+          <a:xfrm>
+            <a:off x="406301" y="4434929"/>
+            <a:ext cx="8498026" cy="213271"/>
+          </a:xfrm>
+          <a:prstGeom prst="rect">
+            <a:avLst/>
+          </a:prstGeom>
+          <a:noFill/>
+          <a:ln/>
+        </p:spPr>
+        <p:txBody>
+          <a:bodyPr wrap="square" lIns="0" tIns="0" rIns="0" bIns="0" rtlCol="0" anchor="t"/>
+          <a:lstStyle/>
+          <a:p>
+            <a:pPr algn="l" indent="0" marL="0">
+              <a:lnSpc>
+                <a:spcPts val="1680"/>
+              </a:lnSpc>
+              <a:spcBef>
+                <a:spcPts val="300"/>
+              </a:spcBef>
+              <a:spcAft>
+                <a:spcPts val="300"/>
+              </a:spcAft>
+              <a:buNone/>
+            </a:pPr>
+            <a:r>
+              <a:rPr lang="en-US" sz="1200" dirty="0">
+                <a:solidFill>
+                  <a:srgbClr val="1A1A1A"/>
+                </a:solidFill>
+                <a:latin typeface="Georgia" pitchFamily="34" charset="0"/>
+                <a:ea typeface="Georgia" pitchFamily="34" charset="-122"/>
+                <a:cs typeface="Georgia" pitchFamily="34" charset="-120"/>
+              </a:rPr>
+              <a:t>Senior ·  · IKS Curriculum</a:t>
+            </a:r>
+            <a:endParaRPr lang="en-US" sz="1200" dirty="0"/>
+          </a:p>
+        </p:txBody>
+      </p:sp>
+    </p:spTree>
+  </p:cSld>
+  <p:clrMapOvr>
+    <a:masterClrMapping/>
+  </p:clrMapOvr>
+</p:sld>
+</file>
+
+<file path=ppt/slides/slide16.xml><?xml version="1.0" encoding="utf-8"?>
+<p:sld xmlns:a="http://schemas.openxmlformats.org/drawingml/2006/main" xmlns:r="http://schemas.openxmlformats.org/officeDocument/2006/relationships" xmlns:p="http://schemas.openxmlformats.org/presentationml/2006/main">
+  <p:cSld name="Slide 16">
+    <p:bg>
+      <p:bgPr>
+        <a:solidFill>
+          <a:srgbClr val="FAF7F2"/>
+        </a:solidFill>
+      </p:bgPr>
+    </p:bg>
+    <p:spTree>
+      <p:nvGrpSpPr>
+        <p:cNvPr id="1" name=""/>
+        <p:cNvGrpSpPr/>
+        <p:nvPr/>
+      </p:nvGrpSpPr>
+      <p:grpSpPr>
+        <a:xfrm>
+          <a:off x="0" y="0"/>
+          <a:ext cx="0" cy="0"/>
+          <a:chOff x="0" y="0"/>
+          <a:chExt cx="0" cy="0"/>
+        </a:xfrm>
+      </p:grpSpPr>
+      <p:sp>
+        <p:nvSpPr>
+          <p:cNvPr id="2" name="Text 0"/>
+          <p:cNvSpPr/>
+          <p:nvPr/>
+        </p:nvSpPr>
+        <p:spPr>
+          <a:xfrm>
+            <a:off x="0" y="0"/>
+            <a:ext cx="9144000" cy="101501"/>
+          </a:xfrm>
+          <a:prstGeom prst="rect">
+            <a:avLst/>
+          </a:prstGeom>
+          <a:solidFill>
+            <a:srgbClr val="5D1D2E"/>
+          </a:solidFill>
+          <a:ln/>
+        </p:spPr>
+        <p:txBody>
+          <a:bodyPr wrap="square" rtlCol="0" anchor="ctr"/>
+          <a:lstStyle/>
+          <a:p>
+            <a:pPr indent="0" marL="0">
+              <a:buNone/>
+            </a:pPr>
+            <a:endParaRPr lang="en-US" dirty="0"/>
+          </a:p>
+        </p:txBody>
+      </p:sp>
+      <p:sp>
+        <p:nvSpPr>
+          <p:cNvPr id="3" name="Text 1"/>
+          <p:cNvSpPr/>
+          <p:nvPr/>
+        </p:nvSpPr>
+        <p:spPr>
+          <a:xfrm>
+            <a:off x="406301" y="457051"/>
+            <a:ext cx="8498026" cy="274290"/>
+          </a:xfrm>
+          <a:prstGeom prst="rect">
+            <a:avLst/>
+          </a:prstGeom>
+          <a:noFill/>
+          <a:ln/>
+        </p:spPr>
+        <p:txBody>
+          <a:bodyPr wrap="square" lIns="0" tIns="0" rIns="0" bIns="0" rtlCol="0" anchor="t"/>
+          <a:lstStyle/>
+          <a:p>
+            <a:pPr algn="l" indent="0" marL="0">
+              <a:lnSpc>
+                <a:spcPts val="2160"/>
+              </a:lnSpc>
+              <a:spcBef>
+                <a:spcPts val="600"/>
+              </a:spcBef>
+              <a:spcAft>
+                <a:spcPts val="800"/>
+              </a:spcAft>
+              <a:buNone/>
+            </a:pPr>
+            <a:r>
+              <a:rPr lang="en-US" sz="1800" b="1" dirty="0">
+                <a:solidFill>
+                  <a:srgbClr val="997929"/>
+                </a:solidFill>
+                <a:latin typeface="Times New Roman" pitchFamily="34" charset="0"/>
+                <a:ea typeface="Times New Roman" pitchFamily="34" charset="-122"/>
+                <a:cs typeface="Times New Roman" pitchFamily="34" charset="-120"/>
+              </a:rPr>
+              <a:t>Teacher notes</a:t>
+            </a:r>
+            <a:endParaRPr lang="en-US" sz="1800" dirty="0"/>
+          </a:p>
+        </p:txBody>
+      </p:sp>
+      <p:sp>
+        <p:nvSpPr>
+          <p:cNvPr id="4" name="Text 2"/>
+          <p:cNvSpPr/>
+          <p:nvPr/>
+        </p:nvSpPr>
+        <p:spPr>
+          <a:xfrm>
+            <a:off x="634901" y="883593"/>
+            <a:ext cx="8102798" cy="731341"/>
+          </a:xfrm>
+          <a:prstGeom prst="rect">
+            <a:avLst/>
+          </a:prstGeom>
+          <a:noFill/>
+          <a:ln/>
+        </p:spPr>
+        <p:txBody>
+          <a:bodyPr wrap="square" lIns="0" tIns="0" rIns="0" bIns="0" rtlCol="0" anchor="t"/>
+          <a:lstStyle/>
+          <a:p>
+            <a:pPr algn="l" marL="342900" indent="-342900">
+              <a:lnSpc>
+                <a:spcPts val="1620"/>
+              </a:lnSpc>
+              <a:spcAft>
+                <a:spcPts val="300"/>
+              </a:spcAft>
+              <a:buSzPct val="100000"/>
+              <a:buChar char="•"/>
+            </a:pPr>
+            <a:r>
+              <a:rPr lang="en-US" sz="1200" dirty="0">
+                <a:solidFill>
+                  <a:srgbClr val="1A1A1A"/>
+                </a:solidFill>
+                <a:latin typeface="Georgia" pitchFamily="34" charset="0"/>
+                <a:ea typeface="Georgia" pitchFamily="34" charset="-122"/>
+                <a:cs typeface="Georgia" pitchFamily="34" charset="-120"/>
+              </a:rPr>
+              <a:t>Push students past "old vs new" framing into "different scopes, different methods."</a:t>
+            </a:r>
+            <a:endParaRPr lang="en-US" sz="1200" dirty="0"/>
+          </a:p>
+          <a:p>
+            <a:pPr algn="l" marL="342900" indent="-342900">
+              <a:lnSpc>
+                <a:spcPts val="1620"/>
+              </a:lnSpc>
+              <a:spcAft>
+                <a:spcPts val="300"/>
+              </a:spcAft>
+              <a:buSzPct val="100000"/>
+              <a:buChar char="•"/>
+            </a:pPr>
+            <a:r>
+              <a:rPr lang="en-US" sz="1200" dirty="0">
+                <a:solidFill>
+                  <a:srgbClr val="1A1A1A"/>
+                </a:solidFill>
+                <a:latin typeface="Georgia" pitchFamily="34" charset="0"/>
+                <a:ea typeface="Georgia" pitchFamily="34" charset="-122"/>
+                <a:cs typeface="Georgia" pitchFamily="34" charset="-120"/>
+              </a:rPr>
+              <a:t>Some students may genuinely believe consciousness is "just neurons" — that's a defensible position. Some may believe it's irreducible. Both are taken seriously in contemporary philosophy of mind; the module shouldn't decide for them.</a:t>
+            </a:r>
+            <a:endParaRPr lang="en-US" sz="1200" dirty="0"/>
+          </a:p>
+        </p:txBody>
+      </p:sp>
+      <p:sp>
+        <p:nvSpPr>
+          <p:cNvPr id="5" name="Text 3"/>
+          <p:cNvSpPr/>
+          <p:nvPr/>
+        </p:nvSpPr>
+        <p:spPr>
+          <a:xfrm>
+            <a:off x="406301" y="4434929"/>
+            <a:ext cx="8498026" cy="213271"/>
+          </a:xfrm>
+          <a:prstGeom prst="rect">
+            <a:avLst/>
+          </a:prstGeom>
+          <a:noFill/>
+          <a:ln/>
+        </p:spPr>
+        <p:txBody>
+          <a:bodyPr wrap="square" lIns="0" tIns="0" rIns="0" bIns="0" rtlCol="0" anchor="t"/>
+          <a:lstStyle/>
+          <a:p>
+            <a:pPr algn="l" indent="0" marL="0">
+              <a:lnSpc>
+                <a:spcPts val="1680"/>
+              </a:lnSpc>
+              <a:spcBef>
+                <a:spcPts val="300"/>
+              </a:spcBef>
+              <a:spcAft>
+                <a:spcPts val="300"/>
+              </a:spcAft>
+              <a:buNone/>
+            </a:pPr>
+            <a:r>
+              <a:rPr lang="en-US" sz="1200" dirty="0">
+                <a:solidFill>
+                  <a:srgbClr val="1A1A1A"/>
+                </a:solidFill>
+                <a:latin typeface="Georgia" pitchFamily="34" charset="0"/>
+                <a:ea typeface="Georgia" pitchFamily="34" charset="-122"/>
+                <a:cs typeface="Georgia" pitchFamily="34" charset="-120"/>
+              </a:rPr>
+              <a:t>Senior ·  · IKS Curriculum</a:t>
+            </a:r>
+            <a:endParaRPr lang="en-US" sz="1200" dirty="0"/>
+          </a:p>
+        </p:txBody>
+      </p:sp>
+    </p:spTree>
+  </p:cSld>
+  <p:clrMapOvr>
+    <a:masterClrMapping/>
+  </p:clrMapOvr>
+</p:sld>
+</file>
+
+<file path=ppt/slides/slide17.xml><?xml version="1.0" encoding="utf-8"?>
+<p:sld xmlns:a="http://schemas.openxmlformats.org/drawingml/2006/main" xmlns:r="http://schemas.openxmlformats.org/officeDocument/2006/relationships" xmlns:p="http://schemas.openxmlformats.org/presentationml/2006/main">
+  <p:cSld name="Slide 17">
+    <p:bg>
+      <p:bgPr>
+        <a:solidFill>
+          <a:srgbClr val="FAF7F2"/>
+        </a:solidFill>
+      </p:bgPr>
+    </p:bg>
+    <p:spTree>
+      <p:nvGrpSpPr>
+        <p:cNvPr id="1" name=""/>
+        <p:cNvGrpSpPr/>
+        <p:nvPr/>
+      </p:nvGrpSpPr>
+      <p:grpSpPr>
+        <a:xfrm>
+          <a:off x="0" y="0"/>
+          <a:ext cx="0" cy="0"/>
+          <a:chOff x="0" y="0"/>
+          <a:chExt cx="0" cy="0"/>
+        </a:xfrm>
+      </p:grpSpPr>
+      <p:sp>
+        <p:nvSpPr>
+          <p:cNvPr id="2" name="Text 0"/>
+          <p:cNvSpPr/>
+          <p:nvPr/>
+        </p:nvSpPr>
+        <p:spPr>
+          <a:xfrm>
+            <a:off x="0" y="0"/>
+            <a:ext cx="9144000" cy="101501"/>
+          </a:xfrm>
+          <a:prstGeom prst="rect">
+            <a:avLst/>
+          </a:prstGeom>
+          <a:solidFill>
+            <a:srgbClr val="5D1D2E"/>
+          </a:solidFill>
+          <a:ln/>
+        </p:spPr>
+        <p:txBody>
+          <a:bodyPr wrap="square" rtlCol="0" anchor="ctr"/>
+          <a:lstStyle/>
+          <a:p>
+            <a:pPr indent="0" marL="0">
+              <a:buNone/>
+            </a:pPr>
+            <a:endParaRPr lang="en-US" dirty="0"/>
+          </a:p>
+        </p:txBody>
+      </p:sp>
+      <p:sp>
+        <p:nvSpPr>
+          <p:cNvPr id="3" name="Text 1"/>
+          <p:cNvSpPr/>
+          <p:nvPr/>
+        </p:nvSpPr>
+        <p:spPr>
+          <a:xfrm>
+            <a:off x="406301" y="457051"/>
+            <a:ext cx="8498026" cy="274290"/>
+          </a:xfrm>
+          <a:prstGeom prst="rect">
+            <a:avLst/>
+          </a:prstGeom>
+          <a:noFill/>
+          <a:ln/>
+        </p:spPr>
+        <p:txBody>
+          <a:bodyPr wrap="square" lIns="0" tIns="0" rIns="0" bIns="0" rtlCol="0" anchor="t"/>
+          <a:lstStyle/>
+          <a:p>
+            <a:pPr algn="l" indent="0" marL="0">
+              <a:lnSpc>
+                <a:spcPts val="2160"/>
+              </a:lnSpc>
+              <a:spcBef>
+                <a:spcPts val="600"/>
+              </a:spcBef>
+              <a:spcAft>
+                <a:spcPts val="800"/>
+              </a:spcAft>
+              <a:buNone/>
+            </a:pPr>
+            <a:r>
+              <a:rPr lang="en-US" sz="1800" b="1" dirty="0">
+                <a:solidFill>
+                  <a:srgbClr val="997929"/>
+                </a:solidFill>
+                <a:latin typeface="Times New Roman" pitchFamily="34" charset="0"/>
+                <a:ea typeface="Times New Roman" pitchFamily="34" charset="-122"/>
+                <a:cs typeface="Times New Roman" pitchFamily="34" charset="-120"/>
+              </a:rPr>
+              <a:t>Citation(s) used</a:t>
+            </a:r>
+            <a:endParaRPr lang="en-US" sz="1800" dirty="0"/>
+          </a:p>
+        </p:txBody>
+      </p:sp>
+      <p:sp>
+        <p:nvSpPr>
+          <p:cNvPr id="4" name="Text 2"/>
+          <p:cNvSpPr/>
+          <p:nvPr/>
+        </p:nvSpPr>
+        <p:spPr>
+          <a:xfrm>
+            <a:off x="634901" y="883593"/>
+            <a:ext cx="8102798" cy="525661"/>
+          </a:xfrm>
+          <a:prstGeom prst="rect">
+            <a:avLst/>
+          </a:prstGeom>
+          <a:noFill/>
+          <a:ln/>
+        </p:spPr>
+        <p:txBody>
+          <a:bodyPr wrap="square" lIns="0" tIns="0" rIns="0" bIns="0" rtlCol="0" anchor="t"/>
+          <a:lstStyle/>
+          <a:p>
+            <a:pPr algn="l" marL="342900" indent="-342900">
+              <a:lnSpc>
+                <a:spcPts val="1620"/>
+              </a:lnSpc>
+              <a:spcAft>
+                <a:spcPts val="300"/>
+              </a:spcAft>
+              <a:buSzPct val="100000"/>
+              <a:buChar char="•"/>
+            </a:pPr>
+            <a:r>
+              <a:rPr lang="en-US" sz="1200" dirty="0">
+                <a:solidFill>
+                  <a:srgbClr val="1A1A1A"/>
+                </a:solidFill>
+                <a:latin typeface="Georgia" pitchFamily="34" charset="0"/>
+                <a:ea typeface="Georgia" pitchFamily="34" charset="-122"/>
+                <a:cs typeface="Georgia" pitchFamily="34" charset="-120"/>
+              </a:rPr>
+              <a:t>NCERT Class 11 Chemistry, Chapter 1.</a:t>
+            </a:r>
+            <a:endParaRPr lang="en-US" sz="1200" dirty="0"/>
+          </a:p>
+          <a:p>
+            <a:pPr algn="l" marL="342900" indent="-342900">
+              <a:lnSpc>
+                <a:spcPts val="1620"/>
+              </a:lnSpc>
+              <a:spcAft>
+                <a:spcPts val="300"/>
+              </a:spcAft>
+              <a:buSzPct val="100000"/>
+              <a:buChar char="•"/>
+            </a:pPr>
+            <a:r>
+              <a:rPr lang="en-US" sz="1200" dirty="0">
+                <a:solidFill>
+                  <a:srgbClr val="1A1A1A"/>
+                </a:solidFill>
+                <a:latin typeface="Georgia" pitchFamily="34" charset="0"/>
+                <a:ea typeface="Georgia" pitchFamily="34" charset="-122"/>
+                <a:cs typeface="Georgia" pitchFamily="34" charset="-120"/>
+              </a:rPr>
               <a:t>(Optional) Nagel, T. (1974). "What Is It Like to Be a Bat?" </a:t>
             </a:r>
             <a:pPr algn="l" indent="0" marL="0">
@@ -2350,7 +4584,7 @@
       </p:sp>
       <p:sp>
         <p:nvSpPr>
-          <p:cNvPr id="6" name="Text 4"/>
+          <p:cNvPr id="5" name="Text 3"/>
           <p:cNvSpPr/>
           <p:nvPr/>
         </p:nvSpPr>
@@ -2500,7 +4734,7 @@
                 <a:ea typeface="Times New Roman" pitchFamily="34" charset="-122"/>
                 <a:cs typeface="Times New Roman" pitchFamily="34" charset="-120"/>
               </a:rPr>
-              <a:t>Materials</a:t>
+              <a:t>Learning objective</a:t>
             </a:r>
             <a:endParaRPr lang="en-US" sz="1800" dirty="0"/>
           </a:p>
@@ -2515,7 +4749,7 @@
         <p:spPr>
           <a:xfrm>
             <a:off x="406301" y="870942"/>
-            <a:ext cx="8498026" cy="213271"/>
+            <a:ext cx="8498026" cy="426541"/>
           </a:xfrm>
           <a:prstGeom prst="rect">
             <a:avLst/>
@@ -2548,7 +4782,99 @@
                 <a:ea typeface="Georgia" pitchFamily="34" charset="-122"/>
                 <a:cs typeface="Georgia" pitchFamily="34" charset="-120"/>
               </a:rPr>
-              <a:t>– Periodic table poster – NCERT Class 11 Chemistry, Chapter 1 (atomic structure) — printed extract – Whiteboard</a:t>
+              <a:t>Students identify three things modern science </a:t>
+            </a:r>
+            <a:pPr algn="l" indent="0" marL="0">
+              <a:lnSpc>
+                <a:spcPts val="1680"/>
+              </a:lnSpc>
+              <a:spcBef>
+                <a:spcPts val="300"/>
+              </a:spcBef>
+              <a:spcAft>
+                <a:spcPts val="300"/>
+              </a:spcAft>
+              <a:buNone/>
+            </a:pPr>
+            <a:r>
+              <a:rPr lang="en-US" sz="1200" i="1" dirty="0">
+                <a:solidFill>
+                  <a:srgbClr val="1A1A1A"/>
+                </a:solidFill>
+                <a:latin typeface="Georgia" pitchFamily="34" charset="0"/>
+                <a:ea typeface="Georgia" pitchFamily="34" charset="-122"/>
+                <a:cs typeface="Georgia" pitchFamily="34" charset="-120"/>
+              </a:rPr>
+              <a:t>adds</a:t>
+            </a:r>
+            <a:pPr algn="l" indent="0" marL="0">
+              <a:lnSpc>
+                <a:spcPts val="1680"/>
+              </a:lnSpc>
+              <a:spcBef>
+                <a:spcPts val="300"/>
+              </a:spcBef>
+              <a:spcAft>
+                <a:spcPts val="300"/>
+              </a:spcAft>
+              <a:buNone/>
+            </a:pPr>
+            <a:r>
+              <a:rPr lang="en-US" sz="1200" dirty="0">
+                <a:solidFill>
+                  <a:srgbClr val="1A1A1A"/>
+                </a:solidFill>
+                <a:latin typeface="Georgia" pitchFamily="34" charset="0"/>
+                <a:ea typeface="Georgia" pitchFamily="34" charset="-122"/>
+                <a:cs typeface="Georgia" pitchFamily="34" charset="-120"/>
+              </a:rPr>
+              <a:t> to the picture that Sāṅkhya does not have, and three things Sāṅkhya </a:t>
+            </a:r>
+            <a:pPr algn="l" indent="0" marL="0">
+              <a:lnSpc>
+                <a:spcPts val="1680"/>
+              </a:lnSpc>
+              <a:spcBef>
+                <a:spcPts val="300"/>
+              </a:spcBef>
+              <a:spcAft>
+                <a:spcPts val="300"/>
+              </a:spcAft>
+              <a:buNone/>
+            </a:pPr>
+            <a:r>
+              <a:rPr lang="en-US" sz="1200" i="1" dirty="0">
+                <a:solidFill>
+                  <a:srgbClr val="1A1A1A"/>
+                </a:solidFill>
+                <a:latin typeface="Georgia" pitchFamily="34" charset="0"/>
+                <a:ea typeface="Georgia" pitchFamily="34" charset="-122"/>
+                <a:cs typeface="Georgia" pitchFamily="34" charset="-120"/>
+              </a:rPr>
+              <a:t>includes</a:t>
+            </a:r>
+            <a:pPr algn="l" indent="0" marL="0">
+              <a:lnSpc>
+                <a:spcPts val="1680"/>
+              </a:lnSpc>
+              <a:spcBef>
+                <a:spcPts val="300"/>
+              </a:spcBef>
+              <a:spcAft>
+                <a:spcPts val="300"/>
+              </a:spcAft>
+              <a:buNone/>
+            </a:pPr>
+            <a:r>
+              <a:rPr lang="en-US" sz="1200" dirty="0">
+                <a:solidFill>
+                  <a:srgbClr val="1A1A1A"/>
+                </a:solidFill>
+                <a:latin typeface="Georgia" pitchFamily="34" charset="0"/>
+                <a:ea typeface="Georgia" pitchFamily="34" charset="-122"/>
+                <a:cs typeface="Georgia" pitchFamily="34" charset="-120"/>
+              </a:rPr>
+              <a:t> that modern science explicitly excludes.</a:t>
             </a:r>
             <a:endParaRPr lang="en-US" sz="1200" dirty="0"/>
           </a:p>
@@ -2706,7 +5032,7 @@
                 <a:ea typeface="Times New Roman" pitchFamily="34" charset="-122"/>
                 <a:cs typeface="Times New Roman" pitchFamily="34" charset="-120"/>
               </a:rPr>
-              <a:t>Flow</a:t>
+              <a:t>Materials</a:t>
             </a:r>
             <a:endParaRPr lang="en-US" sz="1800" dirty="0"/>
           </a:p>
@@ -2715,6 +5041,100 @@
       <p:sp>
         <p:nvSpPr>
           <p:cNvPr id="4" name="Text 2"/>
+          <p:cNvSpPr/>
+          <p:nvPr/>
+        </p:nvSpPr>
+        <p:spPr>
+          <a:xfrm>
+            <a:off x="634901" y="883593"/>
+            <a:ext cx="8102798" cy="769441"/>
+          </a:xfrm>
+          <a:prstGeom prst="rect">
+            <a:avLst/>
+          </a:prstGeom>
+          <a:noFill/>
+          <a:ln/>
+        </p:spPr>
+        <p:txBody>
+          <a:bodyPr wrap="square" lIns="0" tIns="0" rIns="0" bIns="0" rtlCol="0" anchor="t"/>
+          <a:lstStyle/>
+          <a:p>
+            <a:pPr algn="l" marL="342900" indent="-342900">
+              <a:lnSpc>
+                <a:spcPts val="1620"/>
+              </a:lnSpc>
+              <a:spcAft>
+                <a:spcPts val="300"/>
+              </a:spcAft>
+              <a:buSzPct val="100000"/>
+              <a:buChar char="•"/>
+            </a:pPr>
+            <a:r>
+              <a:rPr lang="en-US" sz="1200" dirty="0">
+                <a:solidFill>
+                  <a:srgbClr val="1A1A1A"/>
+                </a:solidFill>
+                <a:latin typeface="Georgia" pitchFamily="34" charset="0"/>
+                <a:ea typeface="Georgia" pitchFamily="34" charset="-122"/>
+                <a:cs typeface="Georgia" pitchFamily="34" charset="-120"/>
+              </a:rPr>
+              <a:t>Periodic table poster</a:t>
+            </a:r>
+            <a:endParaRPr lang="en-US" sz="1200" dirty="0"/>
+          </a:p>
+          <a:p>
+            <a:pPr algn="l" marL="342900" indent="-342900">
+              <a:lnSpc>
+                <a:spcPts val="1620"/>
+              </a:lnSpc>
+              <a:spcAft>
+                <a:spcPts val="300"/>
+              </a:spcAft>
+              <a:buSzPct val="100000"/>
+              <a:buChar char="•"/>
+            </a:pPr>
+            <a:r>
+              <a:rPr lang="en-US" sz="1200" dirty="0">
+                <a:solidFill>
+                  <a:srgbClr val="1A1A1A"/>
+                </a:solidFill>
+                <a:latin typeface="Georgia" pitchFamily="34" charset="0"/>
+                <a:ea typeface="Georgia" pitchFamily="34" charset="-122"/>
+                <a:cs typeface="Georgia" pitchFamily="34" charset="-120"/>
+              </a:rPr>
+              <a:t>NCERT Class 11 Chemistry, Chapter 1 (atomic structure) — printed extract</a:t>
+            </a:r>
+            <a:endParaRPr lang="en-US" sz="1200" dirty="0"/>
+          </a:p>
+          <a:p>
+            <a:pPr algn="l" marL="342900" indent="-342900">
+              <a:lnSpc>
+                <a:spcPts val="1620"/>
+              </a:lnSpc>
+              <a:spcAft>
+                <a:spcPts val="300"/>
+              </a:spcAft>
+              <a:buSzPct val="100000"/>
+              <a:buChar char="•"/>
+            </a:pPr>
+            <a:r>
+              <a:rPr lang="en-US" sz="1200" dirty="0">
+                <a:solidFill>
+                  <a:srgbClr val="1A1A1A"/>
+                </a:solidFill>
+                <a:latin typeface="Georgia" pitchFamily="34" charset="0"/>
+                <a:ea typeface="Georgia" pitchFamily="34" charset="-122"/>
+                <a:cs typeface="Georgia" pitchFamily="34" charset="-120"/>
+              </a:rPr>
+              <a:t>Whiteboard</a:t>
+            </a:r>
+            <a:endParaRPr lang="en-US" sz="1200" dirty="0"/>
+          </a:p>
+        </p:txBody>
+      </p:sp>
+      <p:sp>
+        <p:nvSpPr>
+          <p:cNvPr id="5" name="Text 3"/>
           <p:cNvSpPr/>
           <p:nvPr/>
         </p:nvSpPr>
@@ -2864,7 +5284,7 @@
                 <a:ea typeface="Times New Roman" pitchFamily="34" charset="-122"/>
                 <a:cs typeface="Times New Roman" pitchFamily="34" charset="-120"/>
               </a:rPr>
-              <a:t>Warm-up (5 min)</a:t>
+              <a:t>Flow</a:t>
             </a:r>
             <a:endParaRPr lang="en-US" sz="1800" dirty="0"/>
           </a:p>
@@ -2873,54 +5293,6 @@
       <p:sp>
         <p:nvSpPr>
           <p:cNvPr id="4" name="Text 2"/>
-          <p:cNvSpPr/>
-          <p:nvPr/>
-        </p:nvSpPr>
-        <p:spPr>
-          <a:xfrm>
-            <a:off x="406301" y="870942"/>
-            <a:ext cx="8498026" cy="213271"/>
-          </a:xfrm>
-          <a:prstGeom prst="rect">
-            <a:avLst/>
-          </a:prstGeom>
-          <a:noFill/>
-          <a:ln/>
-        </p:spPr>
-        <p:txBody>
-          <a:bodyPr wrap="square" lIns="0" tIns="0" rIns="0" bIns="0" rtlCol="0" anchor="t"/>
-          <a:lstStyle/>
-          <a:p>
-            <a:pPr algn="l" indent="0" marL="0">
-              <a:lnSpc>
-                <a:spcPts val="1680"/>
-              </a:lnSpc>
-              <a:spcBef>
-                <a:spcPts val="300"/>
-              </a:spcBef>
-              <a:spcAft>
-                <a:spcPts val="300"/>
-              </a:spcAft>
-              <a:buNone/>
-            </a:pPr>
-            <a:r>
-              <a:rPr lang="en-US" sz="1200" dirty="0">
-                <a:solidFill>
-                  <a:srgbClr val="1A1A1A"/>
-                </a:solidFill>
-                <a:latin typeface="Georgia" pitchFamily="34" charset="0"/>
-                <a:ea typeface="Georgia" pitchFamily="34" charset="-122"/>
-                <a:cs typeface="Georgia" pitchFamily="34" charset="-120"/>
-              </a:rPr>
-              <a:t>– Hand back yesterday's quiz. Brief review of common errors.</a:t>
-            </a:r>
-            <a:endParaRPr lang="en-US" sz="1200" dirty="0"/>
-          </a:p>
-        </p:txBody>
-      </p:sp>
-      <p:sp>
-        <p:nvSpPr>
-          <p:cNvPr id="5" name="Text 3"/>
           <p:cNvSpPr/>
           <p:nvPr/>
         </p:nvSpPr>
@@ -3070,7 +5442,7 @@
                 <a:ea typeface="Times New Roman" pitchFamily="34" charset="-122"/>
                 <a:cs typeface="Times New Roman" pitchFamily="34" charset="-120"/>
               </a:rPr>
-              <a:t>Reflection writing (10 min)</a:t>
+              <a:t>Warm-up (5 min)</a:t>
             </a:r>
             <a:endParaRPr lang="en-US" sz="1800" dirty="0"/>
           </a:p>
@@ -3084,8 +5456,8 @@
         </p:nvSpPr>
         <p:spPr>
           <a:xfrm>
-            <a:off x="406301" y="870942"/>
-            <a:ext cx="8498026" cy="639812"/>
+            <a:off x="634901" y="883593"/>
+            <a:ext cx="8102798" cy="281880"/>
           </a:xfrm>
           <a:prstGeom prst="rect">
             <a:avLst/>
@@ -3097,17 +5469,15 @@
           <a:bodyPr wrap="square" lIns="0" tIns="0" rIns="0" bIns="0" rtlCol="0" anchor="t"/>
           <a:lstStyle/>
           <a:p>
-            <a:pPr algn="l" indent="0" marL="0">
-              <a:lnSpc>
-                <a:spcPts val="1680"/>
-              </a:lnSpc>
-              <a:spcBef>
-                <a:spcPts val="300"/>
-              </a:spcBef>
-              <a:spcAft>
-                <a:spcPts val="300"/>
-              </a:spcAft>
-              <a:buNone/>
+            <a:pPr algn="l" marL="342900" indent="-342900">
+              <a:lnSpc>
+                <a:spcPts val="1620"/>
+              </a:lnSpc>
+              <a:spcAft>
+                <a:spcPts val="300"/>
+              </a:spcAft>
+              <a:buSzPct val="100000"/>
+              <a:buChar char="•"/>
             </a:pPr>
             <a:r>
               <a:rPr lang="en-US" sz="1200" dirty="0">
@@ -3118,30 +5488,7 @@
                 <a:ea typeface="Georgia" pitchFamily="34" charset="-122"/>
                 <a:cs typeface="Georgia" pitchFamily="34" charset="-120"/>
               </a:rPr>
-              <a:t>5-minute quick-write: </a:t>
-            </a:r>
-            <a:pPr algn="l" indent="0" marL="0">
-              <a:lnSpc>
-                <a:spcPts val="1680"/>
-              </a:lnSpc>
-              <a:spcBef>
-                <a:spcPts val="300"/>
-              </a:spcBef>
-              <a:spcAft>
-                <a:spcPts val="300"/>
-              </a:spcAft>
-              <a:buNone/>
-            </a:pPr>
-            <a:r>
-              <a:rPr lang="en-US" sz="1200" i="1" dirty="0">
-                <a:solidFill>
-                  <a:srgbClr val="1A1A1A"/>
-                </a:solidFill>
-                <a:latin typeface="Georgia" pitchFamily="34" charset="0"/>
-                <a:ea typeface="Georgia" pitchFamily="34" charset="-122"/>
-                <a:cs typeface="Georgia" pitchFamily="34" charset="-120"/>
-              </a:rPr>
-              <a:t>"For one question above where Sāṅkhya is 'Strong' but modern science is 'Mostly bracketed' or 'Weak,' do you think this is a real intellectual asset of the Sāṅkhya scheme, or a leftover of pre-scientific guessing? Defend your position in 4–5 sentences."</a:t>
+              <a:t>Hand back yesterday's quiz. Brief review of common errors.</a:t>
             </a:r>
             <a:endParaRPr lang="en-US" sz="1200" dirty="0"/>
           </a:p>
@@ -3299,7 +5646,7 @@
                 <a:ea typeface="Times New Roman" pitchFamily="34" charset="-122"/>
                 <a:cs typeface="Times New Roman" pitchFamily="34" charset="-120"/>
               </a:rPr>
-              <a:t>Discussion (5 min)</a:t>
+              <a:t>Core (25 min)</a:t>
             </a:r>
             <a:endParaRPr lang="en-US" sz="1800" dirty="0"/>
           </a:p>
@@ -3313,8 +5660,8 @@
         </p:nvSpPr>
         <p:spPr>
           <a:xfrm>
-            <a:off x="406301" y="870942"/>
-            <a:ext cx="8498026" cy="213271"/>
+            <a:off x="634901" y="883593"/>
+            <a:ext cx="8102798" cy="281880"/>
           </a:xfrm>
           <a:prstGeom prst="rect">
             <a:avLst/>
@@ -3326,28 +5673,26 @@
           <a:bodyPr wrap="square" lIns="0" tIns="0" rIns="0" bIns="0" rtlCol="0" anchor="t"/>
           <a:lstStyle/>
           <a:p>
-            <a:pPr algn="l" indent="0" marL="0">
-              <a:lnSpc>
-                <a:spcPts val="1680"/>
-              </a:lnSpc>
-              <a:spcBef>
-                <a:spcPts val="300"/>
-              </a:spcBef>
-              <a:spcAft>
-                <a:spcPts val="300"/>
-              </a:spcAft>
-              <a:buNone/>
-            </a:pPr>
-            <a:r>
-              <a:rPr lang="en-US" sz="1200" dirty="0">
-                <a:solidFill>
-                  <a:srgbClr val="1A1A1A"/>
-                </a:solidFill>
-                <a:latin typeface="Georgia" pitchFamily="34" charset="0"/>
-                <a:ea typeface="Georgia" pitchFamily="34" charset="-122"/>
-                <a:cs typeface="Georgia" pitchFamily="34" charset="-120"/>
-              </a:rPr>
-              <a:t>3 students share their position. Note the diversity of views.</a:t>
+            <a:pPr algn="l" marL="342900" indent="-342900">
+              <a:lnSpc>
+                <a:spcPts val="1620"/>
+              </a:lnSpc>
+              <a:spcAft>
+                <a:spcPts val="300"/>
+              </a:spcAft>
+              <a:buSzPct val="100000"/>
+              <a:buChar char="•"/>
+            </a:pPr>
+            <a:r>
+              <a:rPr lang="en-US" sz="1200" b="1" dirty="0">
+                <a:solidFill>
+                  <a:srgbClr val="1A1A1A"/>
+                </a:solidFill>
+                <a:latin typeface="Georgia" pitchFamily="34" charset="0"/>
+                <a:ea typeface="Georgia" pitchFamily="34" charset="-122"/>
+                <a:cs typeface="Georgia" pitchFamily="34" charset="-120"/>
+              </a:rPr>
+              <a:t>What modern science adds:</a:t>
             </a:r>
             <a:endParaRPr lang="en-US" sz="1200" dirty="0"/>
           </a:p>
@@ -3505,7 +5850,7 @@
                 <a:ea typeface="Times New Roman" pitchFamily="34" charset="-122"/>
                 <a:cs typeface="Times New Roman" pitchFamily="34" charset="-120"/>
               </a:rPr>
-              <a:t>Wrap-up (5 min)</a:t>
+              <a:t>Core (25 min) (cont.)</a:t>
             </a:r>
             <a:endParaRPr lang="en-US" sz="1800" dirty="0"/>
           </a:p>
@@ -3519,8 +5864,8 @@
         </p:nvSpPr>
         <p:spPr>
           <a:xfrm>
-            <a:off x="406301" y="870942"/>
-            <a:ext cx="8498026" cy="213271"/>
+            <a:off x="634901" y="883593"/>
+            <a:ext cx="8102798" cy="1424583"/>
           </a:xfrm>
           <a:prstGeom prst="rect">
             <a:avLst/>
@@ -3532,13 +5877,31 @@
           <a:bodyPr wrap="square" lIns="0" tIns="0" rIns="0" bIns="0" rtlCol="0" anchor="t"/>
           <a:lstStyle/>
           <a:p>
-            <a:pPr algn="l" indent="0" marL="0">
-              <a:lnSpc>
-                <a:spcPts val="1680"/>
-              </a:lnSpc>
-              <a:spcBef>
-                <a:spcPts val="300"/>
-              </a:spcBef>
+            <a:pPr algn="l" marL="342900" indent="-342900">
+              <a:lnSpc>
+                <a:spcPts val="1620"/>
+              </a:lnSpc>
+              <a:spcAft>
+                <a:spcPts val="300"/>
+              </a:spcAft>
+              <a:buSzPct val="100000"/>
+              <a:buChar char="•"/>
+            </a:pPr>
+            <a:r>
+              <a:rPr lang="en-US" sz="1200" b="1" dirty="0">
+                <a:solidFill>
+                  <a:srgbClr val="1A1A1A"/>
+                </a:solidFill>
+                <a:latin typeface="Georgia" pitchFamily="34" charset="0"/>
+                <a:ea typeface="Georgia" pitchFamily="34" charset="-122"/>
+                <a:cs typeface="Georgia" pitchFamily="34" charset="-120"/>
+              </a:rPr>
+              <a:t>Atomic structure</a:t>
+            </a:r>
+            <a:pPr algn="l" indent="0" marL="0">
+              <a:lnSpc>
+                <a:spcPts val="1620"/>
+              </a:lnSpc>
               <a:spcAft>
                 <a:spcPts val="300"/>
               </a:spcAft>
@@ -3553,30 +5916,139 @@
                 <a:ea typeface="Georgia" pitchFamily="34" charset="-122"/>
                 <a:cs typeface="Georgia" pitchFamily="34" charset="-120"/>
               </a:rPr>
-              <a:t>– Preview Day 7: </a:t>
-            </a:r>
-            <a:pPr algn="l" indent="0" marL="0">
-              <a:lnSpc>
-                <a:spcPts val="1680"/>
-              </a:lnSpc>
-              <a:spcBef>
-                <a:spcPts val="300"/>
-              </a:spcBef>
-              <a:spcAft>
-                <a:spcPts val="300"/>
-              </a:spcAft>
-              <a:buNone/>
-            </a:pPr>
-            <a:r>
-              <a:rPr lang="en-US" sz="1200" i="1" dirty="0">
-                <a:solidFill>
-                  <a:srgbClr val="1A1A1A"/>
-                </a:solidFill>
-                <a:latin typeface="Georgia" pitchFamily="34" charset="0"/>
-                <a:ea typeface="Georgia" pitchFamily="34" charset="-122"/>
-                <a:cs typeface="Georgia" pitchFamily="34" charset="-120"/>
-              </a:rPr>
-              <a:t>"Tomorrow — group debate. Should IKS be integrated into mainstream science class?"</a:t>
+              <a:t> — protons, neutrons, electrons. The periodic table's 118 elements are atom-based, not state-of-matter-based.</a:t>
+            </a:r>
+            <a:endParaRPr lang="en-US" sz="1200" dirty="0"/>
+          </a:p>
+          <a:p>
+            <a:pPr algn="l" marL="342900" indent="-342900">
+              <a:lnSpc>
+                <a:spcPts val="1620"/>
+              </a:lnSpc>
+              <a:spcAft>
+                <a:spcPts val="300"/>
+              </a:spcAft>
+              <a:buSzPct val="100000"/>
+              <a:buChar char="•"/>
+            </a:pPr>
+            <a:r>
+              <a:rPr lang="en-US" sz="1200" b="1" dirty="0">
+                <a:solidFill>
+                  <a:srgbClr val="1A1A1A"/>
+                </a:solidFill>
+                <a:latin typeface="Georgia" pitchFamily="34" charset="0"/>
+                <a:ea typeface="Georgia" pitchFamily="34" charset="-122"/>
+                <a:cs typeface="Georgia" pitchFamily="34" charset="-120"/>
+              </a:rPr>
+              <a:t>Predictive chemistry</a:t>
+            </a:r>
+            <a:pPr algn="l" indent="0" marL="0">
+              <a:lnSpc>
+                <a:spcPts val="1620"/>
+              </a:lnSpc>
+              <a:spcAft>
+                <a:spcPts val="300"/>
+              </a:spcAft>
+              <a:buNone/>
+            </a:pPr>
+            <a:r>
+              <a:rPr lang="en-US" sz="1200" dirty="0">
+                <a:solidFill>
+                  <a:srgbClr val="1A1A1A"/>
+                </a:solidFill>
+                <a:latin typeface="Georgia" pitchFamily="34" charset="0"/>
+                <a:ea typeface="Georgia" pitchFamily="34" charset="-122"/>
+                <a:cs typeface="Georgia" pitchFamily="34" charset="-120"/>
+              </a:rPr>
+              <a:t> — combinations follow rules (valence, electronegativity) we can calculate.</a:t>
+            </a:r>
+            <a:endParaRPr lang="en-US" sz="1200" dirty="0"/>
+          </a:p>
+          <a:p>
+            <a:pPr algn="l" marL="342900" indent="-342900">
+              <a:lnSpc>
+                <a:spcPts val="1620"/>
+              </a:lnSpc>
+              <a:spcAft>
+                <a:spcPts val="300"/>
+              </a:spcAft>
+              <a:buSzPct val="100000"/>
+              <a:buChar char="•"/>
+            </a:pPr>
+            <a:r>
+              <a:rPr lang="en-US" sz="1200" b="1" dirty="0">
+                <a:solidFill>
+                  <a:srgbClr val="1A1A1A"/>
+                </a:solidFill>
+                <a:latin typeface="Georgia" pitchFamily="34" charset="0"/>
+                <a:ea typeface="Georgia" pitchFamily="34" charset="-122"/>
+                <a:cs typeface="Georgia" pitchFamily="34" charset="-120"/>
+              </a:rPr>
+              <a:t>Subatomic and field-level descriptions</a:t>
+            </a:r>
+            <a:pPr algn="l" indent="0" marL="0">
+              <a:lnSpc>
+                <a:spcPts val="1620"/>
+              </a:lnSpc>
+              <a:spcAft>
+                <a:spcPts val="300"/>
+              </a:spcAft>
+              <a:buNone/>
+            </a:pPr>
+            <a:r>
+              <a:rPr lang="en-US" sz="1200" dirty="0">
+                <a:solidFill>
+                  <a:srgbClr val="1A1A1A"/>
+                </a:solidFill>
+                <a:latin typeface="Georgia" pitchFamily="34" charset="0"/>
+                <a:ea typeface="Georgia" pitchFamily="34" charset="-122"/>
+                <a:cs typeface="Georgia" pitchFamily="34" charset="-120"/>
+              </a:rPr>
+              <a:t> — quarks, electromagnetic field, weak and strong forces. None of this is in Sāṅkhya.</a:t>
+            </a:r>
+            <a:endParaRPr lang="en-US" sz="1200" dirty="0"/>
+          </a:p>
+          <a:p>
+            <a:pPr algn="l" marL="342900" indent="-342900">
+              <a:lnSpc>
+                <a:spcPts val="1620"/>
+              </a:lnSpc>
+              <a:spcAft>
+                <a:spcPts val="300"/>
+              </a:spcAft>
+              <a:buSzPct val="100000"/>
+              <a:buChar char="•"/>
+            </a:pPr>
+            <a:r>
+              <a:rPr lang="en-US" sz="1200" b="1" dirty="0">
+                <a:solidFill>
+                  <a:srgbClr val="1A1A1A"/>
+                </a:solidFill>
+                <a:latin typeface="Georgia" pitchFamily="34" charset="0"/>
+                <a:ea typeface="Georgia" pitchFamily="34" charset="-122"/>
+                <a:cs typeface="Georgia" pitchFamily="34" charset="-120"/>
+              </a:rPr>
+              <a:t>Quantitative measurement</a:t>
+            </a:r>
+            <a:pPr algn="l" indent="0" marL="0">
+              <a:lnSpc>
+                <a:spcPts val="1620"/>
+              </a:lnSpc>
+              <a:spcAft>
+                <a:spcPts val="300"/>
+              </a:spcAft>
+              <a:buNone/>
+            </a:pPr>
+            <a:r>
+              <a:rPr lang="en-US" sz="1200" dirty="0">
+                <a:solidFill>
+                  <a:srgbClr val="1A1A1A"/>
+                </a:solidFill>
+                <a:latin typeface="Georgia" pitchFamily="34" charset="0"/>
+                <a:ea typeface="Georgia" pitchFamily="34" charset="-122"/>
+                <a:cs typeface="Georgia" pitchFamily="34" charset="-120"/>
+              </a:rPr>
+              <a:t> — mass, density, melting point. Sāṅkhya is qualitative.</a:t>
             </a:r>
             <a:endParaRPr lang="en-US" sz="1200" dirty="0"/>
           </a:p>
@@ -3734,7 +6206,7 @@
                 <a:ea typeface="Times New Roman" pitchFamily="34" charset="-122"/>
                 <a:cs typeface="Times New Roman" pitchFamily="34" charset="-120"/>
               </a:rPr>
-              <a:t>Differentiation</a:t>
+              <a:t>Core (25 min) (cont.)</a:t>
             </a:r>
             <a:endParaRPr lang="en-US" sz="1800" dirty="0"/>
           </a:p>
@@ -3749,7 +6221,7 @@
         <p:spPr>
           <a:xfrm>
             <a:off x="634901" y="883593"/>
-            <a:ext cx="8102798" cy="731341"/>
+            <a:ext cx="8102798" cy="281880"/>
           </a:xfrm>
           <a:prstGeom prst="rect">
             <a:avLst/>
@@ -3780,71 +6252,7 @@
                 <a:ea typeface="Georgia" pitchFamily="34" charset="-122"/>
                 <a:cs typeface="Georgia" pitchFamily="34" charset="-120"/>
               </a:rPr>
-              <a:t>Tier up:</a:t>
-            </a:r>
-            <a:pPr algn="l" indent="0" marL="0">
-              <a:lnSpc>
-                <a:spcPts val="1620"/>
-              </a:lnSpc>
-              <a:spcAft>
-                <a:spcPts val="300"/>
-              </a:spcAft>
-              <a:buNone/>
-            </a:pPr>
-            <a:r>
-              <a:rPr lang="en-US" sz="1200" dirty="0">
-                <a:solidFill>
-                  <a:srgbClr val="1A1A1A"/>
-                </a:solidFill>
-                <a:latin typeface="Georgia" pitchFamily="34" charset="0"/>
-                <a:ea typeface="Georgia" pitchFamily="34" charset="-122"/>
-                <a:cs typeface="Georgia" pitchFamily="34" charset="-120"/>
-              </a:rPr>
-              <a:t> Read Thomas Nagel's "What Is It Like to Be a Bat?" — write 1 paragraph on whether Sāṅkhya's tanmātra-indriya symmetry maps onto Nagel's "subjective experience" question.</a:t>
-            </a:r>
-            <a:endParaRPr lang="en-US" sz="1200" dirty="0"/>
-          </a:p>
-          <a:p>
-            <a:pPr algn="l" marL="342900" indent="-342900">
-              <a:lnSpc>
-                <a:spcPts val="1620"/>
-              </a:lnSpc>
-              <a:spcAft>
-                <a:spcPts val="300"/>
-              </a:spcAft>
-              <a:buSzPct val="100000"/>
-              <a:buChar char="•"/>
-            </a:pPr>
-            <a:r>
-              <a:rPr lang="en-US" sz="1200" b="1" dirty="0">
-                <a:solidFill>
-                  <a:srgbClr val="1A1A1A"/>
-                </a:solidFill>
-                <a:latin typeface="Georgia" pitchFamily="34" charset="0"/>
-                <a:ea typeface="Georgia" pitchFamily="34" charset="-122"/>
-                <a:cs typeface="Georgia" pitchFamily="34" charset="-120"/>
-              </a:rPr>
-              <a:t>Tier down:</a:t>
-            </a:r>
-            <a:pPr algn="l" indent="0" marL="0">
-              <a:lnSpc>
-                <a:spcPts val="1620"/>
-              </a:lnSpc>
-              <a:spcAft>
-                <a:spcPts val="300"/>
-              </a:spcAft>
-              <a:buNone/>
-            </a:pPr>
-            <a:r>
-              <a:rPr lang="en-US" sz="1200" dirty="0">
-                <a:solidFill>
-                  <a:srgbClr val="1A1A1A"/>
-                </a:solidFill>
-                <a:latin typeface="Georgia" pitchFamily="34" charset="0"/>
-                <a:ea typeface="Georgia" pitchFamily="34" charset="-122"/>
-                <a:cs typeface="Georgia" pitchFamily="34" charset="-120"/>
-              </a:rPr>
-              <a:t> Stick to the comparison table; the quick-write can be 2–3 sentences.</a:t>
+              <a:t>What Sāṅkhya includes that modern science explicitly excludes:</a:t>
             </a:r>
             <a:endParaRPr lang="en-US" sz="1200" dirty="0"/>
           </a:p>
@@ -4002,7 +6410,7 @@
                 <a:ea typeface="Times New Roman" pitchFamily="34" charset="-122"/>
                 <a:cs typeface="Times New Roman" pitchFamily="34" charset="-120"/>
               </a:rPr>
-              <a:t>Teacher notes</a:t>
+              <a:t>Core (25 min) (cont.)</a:t>
             </a:r>
             <a:endParaRPr lang="en-US" sz="1800" dirty="0"/>
           </a:p>
@@ -4016,8 +6424,8 @@
         </p:nvSpPr>
         <p:spPr>
           <a:xfrm>
-            <a:off x="406301" y="870942"/>
-            <a:ext cx="8498026" cy="639812"/>
+            <a:off x="634901" y="883593"/>
+            <a:ext cx="8102798" cy="1592163"/>
           </a:xfrm>
           <a:prstGeom prst="rect">
             <a:avLst/>
@@ -4029,13 +6437,40 @@
           <a:bodyPr wrap="square" lIns="0" tIns="0" rIns="0" bIns="0" rtlCol="0" anchor="t"/>
           <a:lstStyle/>
           <a:p>
-            <a:pPr algn="l" indent="0" marL="0">
-              <a:lnSpc>
-                <a:spcPts val="1680"/>
-              </a:lnSpc>
-              <a:spcBef>
-                <a:spcPts val="300"/>
-              </a:spcBef>
+            <a:pPr algn="l" marL="342900" indent="-342900">
+              <a:lnSpc>
+                <a:spcPts val="1620"/>
+              </a:lnSpc>
+              <a:spcAft>
+                <a:spcPts val="300"/>
+              </a:spcAft>
+              <a:buSzPct val="100000"/>
+              <a:buChar char="•"/>
+            </a:pPr>
+            <a:pPr algn="l" indent="0" marL="0">
+              <a:lnSpc>
+                <a:spcPts val="1620"/>
+              </a:lnSpc>
+              <a:spcAft>
+                <a:spcPts val="300"/>
+              </a:spcAft>
+              <a:buNone/>
+            </a:pPr>
+            <a:r>
+              <a:rPr lang="en-US" sz="1200" i="1" dirty="0">
+                <a:solidFill>
+                  <a:srgbClr val="1A1A1A"/>
+                </a:solidFill>
+                <a:latin typeface="Georgia" pitchFamily="34" charset="0"/>
+                <a:ea typeface="Georgia" pitchFamily="34" charset="-122"/>
+                <a:cs typeface="Georgia" pitchFamily="34" charset="-120"/>
+              </a:rPr>
+              <a:t>Empty space (</a:t>
+            </a:r>
+            <a:pPr algn="l" indent="0" marL="0">
+              <a:lnSpc>
+                <a:spcPts val="1620"/>
+              </a:lnSpc>
               <a:spcAft>
                 <a:spcPts val="300"/>
               </a:spcAft>
@@ -4050,7 +6485,215 @@
                 <a:ea typeface="Georgia" pitchFamily="34" charset="-122"/>
                 <a:cs typeface="Georgia" pitchFamily="34" charset="-120"/>
               </a:rPr>
-              <a:t>– Push students past "old vs new" framing into "different scopes, different methods." – Some students may genuinely believe consciousness is "just neurons" — that's a defensible position. Some may believe it's irreducible. Both are taken seriously in contemporary philosophy of mind; the module shouldn't decide for them.</a:t>
+              <a:t>ākāśa</a:t>
+            </a:r>
+            <a:pPr algn="l" indent="0" marL="0">
+              <a:lnSpc>
+                <a:spcPts val="1620"/>
+              </a:lnSpc>
+              <a:spcAft>
+                <a:spcPts val="300"/>
+              </a:spcAft>
+              <a:buNone/>
+            </a:pPr>
+            <a:r>
+              <a:rPr lang="en-US" sz="1200" i="1" dirty="0">
+                <a:solidFill>
+                  <a:srgbClr val="1A1A1A"/>
+                </a:solidFill>
+                <a:latin typeface="Georgia" pitchFamily="34" charset="0"/>
+                <a:ea typeface="Georgia" pitchFamily="34" charset="-122"/>
+                <a:cs typeface="Georgia" pitchFamily="34" charset="-120"/>
+              </a:rPr>
+              <a:t>) as a category</a:t>
+            </a:r>
+            <a:pPr algn="l" indent="0" marL="0">
+              <a:lnSpc>
+                <a:spcPts val="1620"/>
+              </a:lnSpc>
+              <a:spcAft>
+                <a:spcPts val="300"/>
+              </a:spcAft>
+              <a:buNone/>
+            </a:pPr>
+            <a:r>
+              <a:rPr lang="en-US" sz="1200" dirty="0">
+                <a:solidFill>
+                  <a:srgbClr val="1A1A1A"/>
+                </a:solidFill>
+                <a:latin typeface="Georgia" pitchFamily="34" charset="0"/>
+                <a:ea typeface="Georgia" pitchFamily="34" charset="-122"/>
+                <a:cs typeface="Georgia" pitchFamily="34" charset="-120"/>
+              </a:rPr>
+              <a:t>* — modern physics treats vacuum as the absence of matter, not as a distinct category.</a:t>
+            </a:r>
+            <a:endParaRPr lang="en-US" sz="1200" dirty="0"/>
+          </a:p>
+          <a:p>
+            <a:pPr algn="l" marL="342900" indent="-342900">
+              <a:lnSpc>
+                <a:spcPts val="1620"/>
+              </a:lnSpc>
+              <a:spcAft>
+                <a:spcPts val="300"/>
+              </a:spcAft>
+              <a:buSzPct val="100000"/>
+              <a:buChar char="•"/>
+            </a:pPr>
+            <a:r>
+              <a:rPr lang="en-US" sz="1200" b="1" dirty="0">
+                <a:solidFill>
+                  <a:srgbClr val="1A1A1A"/>
+                </a:solidFill>
+                <a:latin typeface="Georgia" pitchFamily="34" charset="0"/>
+                <a:ea typeface="Georgia" pitchFamily="34" charset="-122"/>
+                <a:cs typeface="Georgia" pitchFamily="34" charset="-120"/>
+              </a:rPr>
+              <a:t>A perceptual mapping</a:t>
+            </a:r>
+            <a:pPr algn="l" indent="0" marL="0">
+              <a:lnSpc>
+                <a:spcPts val="1620"/>
+              </a:lnSpc>
+              <a:spcAft>
+                <a:spcPts val="300"/>
+              </a:spcAft>
+              <a:buNone/>
+            </a:pPr>
+            <a:r>
+              <a:rPr lang="en-US" sz="1200" dirty="0">
+                <a:solidFill>
+                  <a:srgbClr val="1A1A1A"/>
+                </a:solidFill>
+                <a:latin typeface="Georgia" pitchFamily="34" charset="0"/>
+                <a:ea typeface="Georgia" pitchFamily="34" charset="-122"/>
+                <a:cs typeface="Georgia" pitchFamily="34" charset="-120"/>
+              </a:rPr>
+              <a:t> — </a:t>
+            </a:r>
+            <a:pPr algn="l" indent="0" marL="0">
+              <a:lnSpc>
+                <a:spcPts val="1620"/>
+              </a:lnSpc>
+              <a:spcAft>
+                <a:spcPts val="300"/>
+              </a:spcAft>
+              <a:buNone/>
+            </a:pPr>
+            <a:r>
+              <a:rPr lang="en-US" sz="1200" i="1" dirty="0">
+                <a:solidFill>
+                  <a:srgbClr val="1A1A1A"/>
+                </a:solidFill>
+                <a:latin typeface="Georgia" pitchFamily="34" charset="0"/>
+                <a:ea typeface="Georgia" pitchFamily="34" charset="-122"/>
+                <a:cs typeface="Georgia" pitchFamily="34" charset="-120"/>
+              </a:rPr>
+              <a:t>tanmātra-indriya</a:t>
+            </a:r>
+            <a:pPr algn="l" indent="0" marL="0">
+              <a:lnSpc>
+                <a:spcPts val="1620"/>
+              </a:lnSpc>
+              <a:spcAft>
+                <a:spcPts val="300"/>
+              </a:spcAft>
+              <a:buNone/>
+            </a:pPr>
+            <a:r>
+              <a:rPr lang="en-US" sz="1200" dirty="0">
+                <a:solidFill>
+                  <a:srgbClr val="1A1A1A"/>
+                </a:solidFill>
+                <a:latin typeface="Georgia" pitchFamily="34" charset="0"/>
+                <a:ea typeface="Georgia" pitchFamily="34" charset="-122"/>
+                <a:cs typeface="Georgia" pitchFamily="34" charset="-120"/>
+              </a:rPr>
+              <a:t> one-to-one symmetry. Modern science treats perception as biology (neuroscience), not as a metaphysical layer.</a:t>
+            </a:r>
+            <a:endParaRPr lang="en-US" sz="1200" dirty="0"/>
+          </a:p>
+          <a:p>
+            <a:pPr algn="l" marL="342900" indent="-342900">
+              <a:lnSpc>
+                <a:spcPts val="1620"/>
+              </a:lnSpc>
+              <a:spcAft>
+                <a:spcPts val="300"/>
+              </a:spcAft>
+              <a:buSzPct val="100000"/>
+              <a:buChar char="•"/>
+            </a:pPr>
+            <a:r>
+              <a:rPr lang="en-US" sz="1200" b="1" dirty="0">
+                <a:solidFill>
+                  <a:srgbClr val="1A1A1A"/>
+                </a:solidFill>
+                <a:latin typeface="Georgia" pitchFamily="34" charset="0"/>
+                <a:ea typeface="Georgia" pitchFamily="34" charset="-122"/>
+                <a:cs typeface="Georgia" pitchFamily="34" charset="-120"/>
+              </a:rPr>
+              <a:t>Consciousness in the scheme</a:t>
+            </a:r>
+            <a:pPr algn="l" indent="0" marL="0">
+              <a:lnSpc>
+                <a:spcPts val="1620"/>
+              </a:lnSpc>
+              <a:spcAft>
+                <a:spcPts val="300"/>
+              </a:spcAft>
+              <a:buNone/>
+            </a:pPr>
+            <a:r>
+              <a:rPr lang="en-US" sz="1200" dirty="0">
+                <a:solidFill>
+                  <a:srgbClr val="1A1A1A"/>
+                </a:solidFill>
+                <a:latin typeface="Georgia" pitchFamily="34" charset="0"/>
+                <a:ea typeface="Georgia" pitchFamily="34" charset="-122"/>
+                <a:cs typeface="Georgia" pitchFamily="34" charset="-120"/>
+              </a:rPr>
+              <a:t> — </a:t>
+            </a:r>
+            <a:pPr algn="l" indent="0" marL="0">
+              <a:lnSpc>
+                <a:spcPts val="1620"/>
+              </a:lnSpc>
+              <a:spcAft>
+                <a:spcPts val="300"/>
+              </a:spcAft>
+              <a:buNone/>
+            </a:pPr>
+            <a:r>
+              <a:rPr lang="en-US" sz="1200" i="1" dirty="0">
+                <a:solidFill>
+                  <a:srgbClr val="1A1A1A"/>
+                </a:solidFill>
+                <a:latin typeface="Georgia" pitchFamily="34" charset="0"/>
+                <a:ea typeface="Georgia" pitchFamily="34" charset="-122"/>
+                <a:cs typeface="Georgia" pitchFamily="34" charset="-120"/>
+              </a:rPr>
+              <a:t>puruṣa</a:t>
+            </a:r>
+            <a:pPr algn="l" indent="0" marL="0">
+              <a:lnSpc>
+                <a:spcPts val="1620"/>
+              </a:lnSpc>
+              <a:spcAft>
+                <a:spcPts val="300"/>
+              </a:spcAft>
+              <a:buNone/>
+            </a:pPr>
+            <a:r>
+              <a:rPr lang="en-US" sz="1200" dirty="0">
+                <a:solidFill>
+                  <a:srgbClr val="1A1A1A"/>
+                </a:solidFill>
+                <a:latin typeface="Georgia" pitchFamily="34" charset="0"/>
+                <a:ea typeface="Georgia" pitchFamily="34" charset="-122"/>
+                <a:cs typeface="Georgia" pitchFamily="34" charset="-120"/>
+              </a:rPr>
+              <a:t> (the witness) is part of the 25-tattva enumeration. Modern science either bracket consciousness (default in chemistry) or treats it as emergent from matter (in some neuroscience interpretations).</a:t>
             </a:r>
             <a:endParaRPr lang="en-US" sz="1200" dirty="0"/>
           </a:p>
